--- a/apresentacao/apresentacao_04.pptx
+++ b/apresentacao/apresentacao_04.pptx
@@ -118,14 +118,14 @@
   <p:extLst>
     <p:ext uri="{521415D9-36F7-43E2-AB2F-B90AF26B5E84}">
       <p14:sectionLst xmlns:p14="http://schemas.microsoft.com/office/powerpoint/2010/main">
-        <p14:section name="Abertura" id="{3833ad81-fde4-a335-8602-915c0c833196}">
+        <p14:section name="Abertura" id="{27af2f7c-e162-a322-1646-24027384394d}">
           <p14:sldIdLst>
             <p14:sldId id="256"/>
             <p14:sldId id="257"/>
             <p14:sldId id="258"/>
           </p14:sldIdLst>
         </p14:section>
-        <p14:section name="Dados e método" id="{4659f938-e0fc-6610-fbe3-ed55553dab1e}">
+        <p14:section name="Dados e método" id="{3024775f-f78e-ac5d-7efa-cf1d927599c9}">
           <p14:sldIdLst>
             <p14:sldId id="259"/>
             <p14:sldId id="260"/>
@@ -133,14 +133,14 @@
             <p14:sldId id="262"/>
           </p14:sldIdLst>
         </p14:section>
-        <p14:section name="Resultados" id="{d1253e3a-1e43-cb2c-00fd-f54cfb5b8054}">
+        <p14:section name="Resultados" id="{5e5f7fea-cb9e-3819-a5cb-374c36958cb0}">
           <p14:sldIdLst>
             <p14:sldId id="263"/>
             <p14:sldId id="264"/>
             <p14:sldId id="265"/>
           </p14:sldIdLst>
         </p14:section>
-        <p14:section name="Conclusão" id="{a1bf704b-8865-fac1-94ea-3c98fd35f886}">
+        <p14:section name="Conclusão" id="{20c383f8-5465-3c68-968d-250efdf27949}">
           <p14:sldIdLst>
             <p14:sldId id="266"/>
             <p14:sldId id="267"/>
@@ -1836,8 +1836,8 @@
           <a:p>
             <a:r>
               <a:rPr lang="en-US" dirty="0"/>
-              <a:t>[Slide 1 de 12 · tempo previsto 0:30 · deve terminar em 0:30 do relógio]
-Agradeço a presença de todos e ao professor Danny, meu orientador. Sou Ricardo Carvalho e apresento, em quinze minutos, a minha dissertação: como a exposição das ocupações à inteligência artificial se relaciona com as transições de trabalho no Brasil depois do ChatGPT, com o painel da PNAD Contínua. São resultados preliminares, e vou dizer com clareza o que sustentam e o que ainda não.</a:t>
+              <a:t>[Slide 1 de 12 · tempo previsto 0:30 · ao terminar, o relógio marca 0:30]
+Obrigado a todos pela presença, e obrigado ao professor Danny, meu orientador. Sou Ricardo Carvalho. Nos próximos quinze minutos, vou contar uma história em três partes: o contexto, a tensão e a resposta. A pergunta é simples. Depois do ChatGPT, o trabalho no Brasil mudou mais para quem está nas ocupações mais expostas à inteligência artificial?</a:t>
             </a:r>
             <a:endParaRPr lang="en-US" dirty="0"/>
           </a:p>
@@ -1925,11 +1925,11 @@
           <a:p>
             <a:r>
               <a:rPr lang="en-US" dirty="0"/>
-              <a:t>[Slide 10 de 12 · tempo previsto 1:15 · deve terminar em 12:15 do relógio]
-Nas margens de vínculo, o sinal é contraintuitivo. Maior exposição se associa a menos saída do emprego, menos 0,25 ponto percentual, e a menos transição de formal para informal, menos 0,67. Ou seja, nesse período, quem está em ocupações mais expostas não mostrou deterioração relativa do vínculo.
-Na informalização, o coeficiente da teletrabalhabilidade é positivo, mais 1,73 ponto percentual, enquanto o da exposição é negativo. Como os índices têm escalas diferentes, o desenho não identifica qual força explica o aumento agregado.
-Esse padrão é compatível com a ideia, de Autor e Thompson, de que a automação pode preservar o vínculo e fazer o ajuste recair sobre o rendimento. Mas compatibilidade não é teste, e esta pesquisa só observa quantidades, não preços.
-Por fim, o teste de atrito: o coeficiente do pareamento é menos 0,261, com p de 0,064. Não rejeito a estabilidade, mas está perto do limiar. Não posso dizer que a seleção longitudinal esteja descartada.</a:t>
+              <a:t>[Slide 10 de 12 · RESOLUÇÃO · tempo previsto 1:20 · ao terminar, o relógio marca 12:20]
+E o emprego? Aqui está a surpresa. [Aponte para os dois primeiros números.] Era de se esperar que os mais expostos perdessem o emprego ou caíssem na informalidade. Não foi o que apareceu. Mais exposição veio junto com um pouco menos de saída do emprego e menos passagem do formal para o informal.
+O terceiro número mostra que, na informalidade, quem aparece associado a mais informalização é o teletrabalho, e não a IA. Como os dois índices têm escalas diferentes, não dá para dizer qual força pesa mais.
+Uma explicação possível vem de Autor e Thompson: a tecnologia pode manter o emprego e mudar o salário. Mas eu não observo salários. Então isso é uma hipótese, e não um teste.
+Por fim, o controle. A chance de reencontrar a pessoa quase variou com a exposição, perto do limite de significância. Por isso não posso descartar que as perdas de entrevista influenciem o resultado.</a:t>
             </a:r>
             <a:endParaRPr lang="en-US" dirty="0"/>
           </a:p>
@@ -2017,10 +2017,11 @@
           <a:p>
             <a:r>
               <a:rPr lang="en-US" dirty="0"/>
-              <a:t>[Slide 11 de 12 · tempo previsto 1:15 · deve terminar em 13:30 do relógio]
-É por isso que o trabalho dedica tanto espaço aos limites. À esquerda, o que os resultados sustentam: houve aumento generalizado da rotatividade; há um gradiente condicional detectável, da ordem de dois pontos percentuais por unidade de exposição; e, nas margens de vínculo, o sinal é oposto ao da leitura alarmista.
-À direita, o que não sustentam. Não é evidência causal: é um único cenário de estimação, sem estudo de evento, sem teste de tendências anteriores ao marco e sem bateria de sensibilidade. A adoção de IA não é observada, o tratamento é um índice de exposição potencial, e o marco é único e nacional.
-E há uma descontinuidade de medida. A taxa de mudança de ocupação em três dígitos cai de 30% para 15% entre 2019T4 e 2020T1, fica entre 13% e 15% durante a coleta telefônica e volta a 34% em 2021T4. A causa não está demonstrada, e é o limite mais sério do trabalho.</a:t>
+              <a:t>[Slide 11 de 12 · RESOLUÇÃO · tempo previsto 1:20 · ao terminar, o relógio marca 13:40]
+Então, o que esses resultados permitem dizer, e o que não permitem?
+Eles permitem dizer três coisas. A mobilidade subiu para todos. Existe um gradiente: quanto mais exposta a ocupação, mais as pessoas foram para ocupações menos expostas, cerca de dois pontos por unidade de exposição. E o vínculo dos mais expostos não piorou.
+Eles não permitem dizer que a IA causou isso. Ainda falta o estudo de evento, que testa se as ocupações já se comportavam de forma diferente antes do marco. Eu não observo quem usa IA, só quem está exposto. E o marco é um só, para o país inteiro.
+E há o limite mais sério. No começo de 2020, justamente quando a entrevista passou a ser por telefone, a taxa medida de mudança de ocupação caiu pela metade, de 30 para 15 por cento. Ela só voltou no fim de 2021. A causa dessa quebra ainda não está demonstrada.</a:t>
             </a:r>
             <a:endParaRPr lang="en-US" dirty="0"/>
           </a:p>
@@ -2108,11 +2109,13 @@
           <a:p>
             <a:r>
               <a:rPr lang="en-US" dirty="0"/>
-              <a:t>[Slide 12 de 12 · tempo previsto 1:30 · deve terminar em 15:00 do relógio]
-Resumindo, em três níveis. No descritivo, a mobilidade subiu para todos, e não só para os mais expostos. Como associação condicional, existe um gradiente detectável, da ordem de dois pontos percentuais por unidade de AIOE, e as margens de vínculo não mostram deterioração. No nível causal, o desenho atual não sustenta a afirmação. O que a pesquisa entrega, hoje, é uma descrição cuidadosa e uma agenda clara para chegar a uma resposta causal, se ela existir.
-Por isso a agenda tem uma ordem. Primeiro, tratar a quebra de medida de 2020 e 2021 e definir a janela homogênea. Segundo, o estudo de evento, com teste conjunto dos coeficientes anteriores ao marco, que diz se existe desenho a defender. Terceiro, uma bateria mínima de sensibilidade: janelas, agrupamento, tendência por exposição e a especificação sem teletrabalhabilidade.
-Quarto, trocar a medida pela específica para modelos de linguagem, de Eloundou e coautores, e rodar o placebo com teletrabalhabilidade. Depois, a sensibilidade a tendências não paralelas e os estimadores para tratamento contínuo. As extensões, como rendimentos, vêm por último.
-Agradeço a atenção e fico à disposição para as perguntas.</a:t>
+              <a:t>[Slide 12 de 12 · RESOLUÇÃO · tempo previsto 1:20 · ao terminar, o relógio marca 15:00]
+Para fechar, a resposta em três níveis.
+Primeiro, o que os dados mostram: depois do ChatGPT, a mobilidade subiu para todos, e não só para os mais expostos.
+Segundo, a associação: existe um gradiente de cerca de dois pontos por unidade de exposição, em direção a ocupações menos expostas. E o vínculo não piorou.
+Terceiro, a causalidade: o desenho atual ainda não permite afirmá-la.
+O que eu entrego hoje é uma descrição cuidadosa e um caminho claro para chegar à resposta causal, se ela existir. Esse caminho tem cinco passos, em ordem. Primeiro, tratar a quebra de 2020 e 2021. Segundo, o estudo de evento. Terceiro, os testes de sensibilidade. Quarto, uma medida feita para modelos de linguagem e um placebo com o teletrabalho. Quinto, métodos próprios para tratamento contínuo. Salários e outras extensões vêm depois.
+Muito obrigado. Fico à disposição para as perguntas.</a:t>
             </a:r>
             <a:endParaRPr lang="en-US" dirty="0"/>
           </a:p>
@@ -2200,9 +2203,12 @@
           <a:p>
             <a:r>
               <a:rPr lang="en-US" dirty="0"/>
-              <a:t>[Slide 2 de 12 · tempo previsto 1:15 · deve terminar em 1:45 do relógio]
-Em 30 de novembro de 2022, o ChatGPT foi aberto ao público. Esse marco tem uma propriedade útil para quem estuda mercado de trabalho: é único, nacional, tem data certa e não depende de decisão de nenhum trabalhador ou empresa da amostra. A pergunta da dissertação é esta: trabalhadores em ocupações mais expostas à inteligência artificial passaram a apresentar transições de trabalho diferentes depois desse marco?
-Três definições antes de seguir. Exposição é uma propriedade da ocupação, medida por um índice. Ela indica o quanto as habilidades da ocupação se aproximam do que a tecnologia faz, e não se alguém usa IA, nem se corre risco de demissão. Transição é o que acontece com a mesma pessoa entre duas entrevistas trimestrais consecutivas. O período vai de 2019 a 2025: quinze trimestres de origem antes do marco e doze depois. E o horizonte é curto, de um trimestre: mede-se o que acontece até a entrevista seguinte.</a:t>
+              <a:t>[Slide 2 de 12 · CONTEXTO · tempo previsto 1:40 · ao terminar, o relógio marca 2:10]
+Começo pelo contexto. Em 30 de novembro de 2022, o ChatGPT foi aberto ao público. De um dia para o outro, uma ferramenta que escreve, resume e programa ficou ao alcance de qualquer pessoa.
+Para quem estuda o mercado de trabalho, esse marco é útil. Ele tem data certa, vale para o país inteiro e não depende da decisão de nenhum trabalhador da pesquisa.
+Daí vem a pergunta da dissertação: quem trabalha em ocupações mais expostas à IA passou a mudar de trabalho de um jeito diferente depois desse marco?
+Por que isso importa? Porque mudar de trabalho mexe com renda, com informalidade e com o tipo de qualificação que o país precisa oferecer. E quase tudo o que se sabe vem de países ricos.
+Duas palavras são importantes. Exposição é uma característica da ocupação, e não da pessoa. Ela mede o quanto as tarefas da ocupação se parecem com o que a IA faz. Não diz se a pessoa usa IA, nem se ela vai perder o emprego. E transição é o que acontece com a mesma pessoa de um trimestre para o seguinte.</a:t>
             </a:r>
             <a:endParaRPr lang="en-US" dirty="0"/>
           </a:p>
@@ -2290,11 +2296,12 @@
           <a:p>
             <a:r>
               <a:rPr lang="en-US" dirty="0"/>
-              <a:t>[Slide 3 de 12 · tempo previsto 1:15 · deve terminar em 3:00 do relógio]
-A literatura tem três frentes. A primeira mede exposição. Felten, Raj e Seamans, em 2021, construíram o AIOE, que liga habilidades das ocupações a aplicações de inteligência artificial. Eloundou e coautores, em 2024, refazem o exercício tarefa a tarefa, para modelos de linguagem.
-A segunda observa adoção e resultados. Brynjolfsson, Li e Raymond acompanham uma central de atendimento e medem ganho de produtividade. Humlum e Vestergaard, na Dinamarca, estimam efeitos nulos e precisos sobre rendimentos e horas dois anos após a adoção, com alguma recomposição de tarefas e troca de ocupação.
-A terceira dá desenho e contexto. Acemoglu e Restrepo usam exposição diferencial para identificar efeitos. Ulyssea mostra que a informalidade é heterogênea, e Meghir e coautores, que a fronteira com o setor formal é atravessada com frequência.
-A lacuna: não há, no Brasil, medida direta de adoção de IA em base representativa. Por isso uso exposição ocupacional num painel domiciliar.</a:t>
+              <a:t>[Slide 3 de 12 · CONTEXTO · tempo previsto 1:15 · ao terminar, o relógio marca 3:25]
+O que já se sabe sobre isso? A literatura anda em três frentes.
+A primeira mede a exposição. Felten, Raj e Seamans criaram o índice que eu uso, chamado AIOE. Ele liga as habilidades de cada ocupação ao que a IA consegue fazer. Eloundou e coautores fizeram algo parecido para os modelos de linguagem.
+A segunda observa quem já adotou a IA. Numa central de atendimento, a produtividade subiu. Na Dinamarca, dois anos depois, salários e horas praticamente não mudaram.
+A terceira me dá o método e o contexto brasileiro, em que as pessoas entram e saem da informalidade com frequência.
+E aqui está a lacuna. No Brasil, não existe uma pesquisa grande que pergunte quem usa IA no trabalho. Então eu uso o que existe: a exposição da ocupação, numa pesquisa feita nos domicílios.</a:t>
             </a:r>
             <a:endParaRPr lang="en-US" dirty="0"/>
           </a:p>
@@ -2382,10 +2389,11 @@
           <a:p>
             <a:r>
               <a:rPr lang="en-US" dirty="0"/>
-              <a:t>[Slide 4 de 12 · tempo previsto 1:15 · deve terminar em 4:15 do relógio]
-Os dados vêm da PNAD Contínua trimestral do IBGE, de 2019 a 2025. É um painel rotativo: cada domicílio é visitado cinco vezes, uma por trimestre. Isso permite tentar ligar a mesma pessoa entre dois trimestres seguidos, mas não existe identificador individual validado. Por isso reconstruí o par exigindo, ao mesmo tempo, mesma UPA, domicílio e número de ordem, mesmo sexo, mesmo dia e mês de nascimento e idade coerente.
-O gráfico mostra a escala. São quase quatro milhões de pessoas-transições com exposição atribuída à origem. Dessas, 80,2% encontram o par na entrevista seguinte, e cada desfecho usa o seu próprio domínio, como o de destino ocupado, com 2,9 milhões. A taxa de pareamento varia entre 0,747 e 0,847 ao longo dos trimestres, com os valores mais baixos em 2020 e 2021, quando a coleta foi por telefone.
-Um aviso: são pessoas-transições, e não pessoas únicas, e o próprio pareamento entra como desfecho, num teste de atrito.</a:t>
+              <a:t>[Slide 4 de 12 · TENSÃO · tempo previsto 1:10 · ao terminar, o relógio marca 4:35]
+Agora começa a tensão, porque responder a essa pergunta não é simples. O primeiro obstáculo está nos dados.
+Uso a PNAD Contínua do IBGE, de 2019 a 2025. Cada domicílio é entrevistado cinco vezes, uma por trimestre. Isso permite acompanhar a mesma pessoa. O problema é que a pesquisa não traz um número de identificação confiável para cada pessoa. Então eu reconstruí os pares: mesmo domicílio, mesmo sexo, mesma data de aniversário e idade coerente.
+O gráfico mostra o tamanho da base. São quase quatro milhões de pares possíveis, e cerca de oitenta por cento encontram a entrevista seguinte. Cada desfecho usa a sua própria parte da base, por isso as barras têm tamanhos diferentes.
+Um detalhe: eu conto transições, e não pessoas. A mesma pessoa pode aparecer até quatro vezes.</a:t>
             </a:r>
             <a:endParaRPr lang="en-US" dirty="0"/>
           </a:p>
@@ -2473,10 +2481,10 @@
           <a:p>
             <a:r>
               <a:rPr lang="en-US" dirty="0"/>
-              <a:t>[Slide 5 de 12 · tempo previsto 1:15 · deve terminar em 5:30 do relógio]
-O tratamento é o AIOE, publicado para a classificação ocupacional americana. Como a PNAD usa a classificação brasileira, construí uma ponte em duas etapas: da COD para a ISCO-08, e da ISCO-08 para a SOC. Quando uma ocupação brasileira se liga a várias americanas, o peso é uniforme, uma hipótese de construção que declaro como tal.
-A cobertura é alta: 416 códigos recebem exposição, 413 entram na estimação, e só 1,08% do peso amostral fica sem valor. O índice é padronizado entre ocupações, com desvio-padrão de 0,9445. Uma unidade de AIOE equivale, portanto, a cerca de um desvio-padrão, e menor exposição não significa emprego pior. O histograma mostra uma distribuição ampla.
-E há um cuidado: a exposição tem correlação de 0,702 com a teletrabalhabilidade. Por isso essa variável entra interagida com o período, para que a exposição não absorva a reorganização do trabalho remoto. Os coeficientes são sempre lidos por unidade de AIOE.</a:t>
+              <a:t>[Slide 5 de 12 · TENSÃO · tempo previsto 1:20 · ao terminar, o relógio marca 5:55]
+O segundo obstáculo é a medida. O índice de exposição foi feito para as ocupações dos Estados Unidos, e a PNAD usa a classificação brasileira. Por isso construí uma ponte em duas etapas: da classificação brasileira para a internacional, e da internacional para a americana. Quando uma ocupação brasileira corresponde a várias americanas, cada uma recebe o mesmo peso. É uma escolha minha, e eu a declaro.
+A cobertura ficou boa: 416 ocupações recebem o índice, e só cerca de um por cento da amostra fica de fora. [Aponte para o histograma.] O gráfico mostra que as ocupações se espalham por toda a escala.
+E há um terceiro obstáculo. As ocupações mais expostas à IA também são as que mais podem ser feitas de casa. A correlação é de 0,7. Por isso o teletrabalho entra no modelo, para que a IA não leve o crédito pelo que foi efeito da pandemia.</a:t>
             </a:r>
             <a:endParaRPr lang="en-US" dirty="0"/>
           </a:p>
@@ -2564,9 +2572,12 @@
           <a:p>
             <a:r>
               <a:rPr lang="en-US" dirty="0"/>
-              <a:t>[Slide 6 de 12 · tempo previsto 1:00 · deve terminar em 6:30 do relógio]
-Estimo sete desfechos, em três famílias. A primeira é de continuidade e vínculo: o pareamento, que funciona como teste de atrito, a saída do emprego e a transição de formal para informal. A segunda é de mobilidade ocupacional: se a pessoa mudou de ocupação, em dois e em três dígitos da classificação. A terceira é de deslocamento no gradiente de exposição: a transição para uma ocupação menos exposta e para uma mais exposta.
-Cada desfecho é estimado no seu próprio domínio, e ausência nunca vira zero: um destino não observado não quer dizer que a pessoa não mudou de ocupação. As duas margens direcionais só podem ser lidas juntas, porque têm uma assimetria mecânica: quem está numa ocupação muito exposta tem mais destinos possíveis abaixo dela.</a:t>
+              <a:t>[Slide 6 de 12 · TENSÃO · tempo previsto 1:00 · ao terminar, o relógio marca 6:55]
+Para saber se o trabalho mudou, olho para sete desfechos, em três grupos.
+O primeiro é o vínculo. A pessoa saiu do emprego? Passou do emprego formal para o informal? E, como controle, ela foi encontrada de novo na entrevista seguinte?
+O segundo é a mobilidade: a pessoa mudou de ocupação?
+O terceiro é a direção: ela foi para uma ocupação menos exposta à IA, ou para uma mais exposta?
+Duas regras. Quando não vejo o destino, não conto como se a pessoa tivesse ficado parada. E as duas direções sempre se leem juntas, porque quem está no topo da exposição tem mais espaço para descer do que para subir.</a:t>
             </a:r>
             <a:endParaRPr lang="en-US" dirty="0"/>
           </a:p>
@@ -2654,11 +2665,11 @@
           <a:p>
             <a:r>
               <a:rPr lang="en-US" dirty="0"/>
-              <a:t>[Slide 7 de 12 · tempo previsto 1:30 · deve terminar em 8:00 do relógio]
-O desenho é de diferenças em diferenças com tratamento contínuo. Não há grupo tratado e grupo de controle: há um marco temporal único e nacional, o lançamento do ChatGPT, e uma intensidade de tratamento que varia entre ocupações, dada pela exposição da ocupação de origem.
-O período pré vai de 2019T1 a 2022T3, com quinze trimestres, e o pós, de 2022T4 a 2025T3, com doze. O trimestre do marco conta como pós, por convenção declarada antes da estimação. O parâmetro de interesse, beta, é o coeficiente da interação entre exposição e período pós. Ele compara a mudança entre pré e pós de ocupações com exposições diferentes, em pontos percentuais por unidade de AIOE.
-A equação traz ainda a teletrabalhabilidade interagida com o pós, a idade, efeitos fixos de ocupação de origem e de UF por trimestre, e efeitos fixos de sexo, cor ou raça, escolaridade, tempo no emprego, tamanho do estabelecimento e setor.
-A estimação é por modelo de probabilidade linear ponderado pelo peso da origem, com erros-padrão agrupados na UPA, em mais de trinta mil grupos. A mesma especificação vale para os sete desfechos.</a:t>
+              <a:t>[Slide 7 de 12 · TENSÃO · tempo previsto 1:20 · ao terminar, o relógio marca 8:15]
+O último obstáculo é o desenho. Não existe um grupo que recebeu a IA e outro que não recebeu. O ChatGPT chegou para todos no mesmo dia. O que muda é a intensidade: algumas ocupações estão mais expostas do que outras.
+Por isso uso diferenças em diferenças com tratamento contínuo. Em palavras simples: comparo o antes e o depois do marco, e pergunto se essa mudança foi maior nas ocupações mais expostas. O antes tem quinze trimestres, e o depois tem doze.
+O número que importa é o beta, em destaque na equação. Ele diz quantos pontos percentuais a mais cada desfecho mudou, para cada unidade a mais de exposição.
+O modelo também leva em conta o teletrabalho, a idade, a ocupação de origem, o estado em cada trimestre e características como sexo, escolaridade e setor. E os erros são calculados por área de coleta, em mais de trinta mil grupos.</a:t>
             </a:r>
             <a:endParaRPr lang="en-US" dirty="0"/>
           </a:p>
@@ -2746,10 +2757,11 @@
           <a:p>
             <a:r>
               <a:rPr lang="en-US" dirty="0"/>
-              <a:t>[Slide 8 de 12 · tempo previsto 1:15 · deve terminar em 9:15 do relógio]
-Antes de qualquer coeficiente, a descrição. À esquerda, as médias antes e depois do marco. A mudança de ocupação em três dígitos sobe de 23,6% para 31,8%, e em dois dígitos, de 20,9% para 28%. As duas margens direcionais sobem quase igual, de 12,8 e 12,9% para 17,4%. A transição de formal para informal vai de 5,2% a 8,8%, e a saída do emprego praticamente não se move. O pareamento também sobe, de 78,3% para 81,2%.
-À direita, a matriz de mobilidade entre cinco faixas de exposição. A permanência na mesma faixa cai em todas elas, entre 3,6 e 8,1 pontos percentuais, e o teste de Wald rejeita a igualdade das matrizes.
-A leitura é que houve um aumento generalizado das taxas medidas de rotatividade, e não uma mudança concentrada nas ocupações mais expostas. Um cuidado: a taxa medida de mudança de ocupação tem uma quebra em 2020 e 2021, que retomo adiante.</a:t>
+              <a:t>[Slide 8 de 12 · TENSÃO · tempo previsto 1:15 · ao terminar, o relógio marca 9:30]
+Antes de qualquer modelo, vamos olhar os dados brutos. E aqui a tensão aumenta.
+[Aponte para o gráfico de barras deitadas.] Aqui estão as médias antes e depois do marco. Mudar de ocupação ficou bem mais comum: passou de cerca de 24 para 32 por cento. Ir para uma ocupação menos exposta subiu, mas ir para uma mais exposta subiu na mesma medida. A passagem do formal para o informal também subiu. Só a saída do emprego ficou praticamente parada.
+[Aponte para o gráfico das cinco faixas, Q1 a Q5.] Agora, as cinco faixas de exposição, da menor para a maior. Em todas elas, ficar na mesma faixa ficou menos comum.
+Ou seja: a mobilidade subiu para todo mundo, e não só para quem está mais exposto à IA. Essa é a tensão do trabalho. Se tudo se mexeu, a IA explica alguma parte desse movimento? É isso que o modelo vai responder.</a:t>
             </a:r>
             <a:endParaRPr lang="en-US" dirty="0"/>
           </a:p>
@@ -2837,11 +2849,11 @@
           <a:p>
             <a:r>
               <a:rPr lang="en-US" dirty="0"/>
-              <a:t>[Slide 9 de 12 · tempo previsto 1:45 · deve terminar em 11:00 do relógio]
-Este é o resultado principal. O gráfico mostra o coeficiente beta de cada desfecho, com intervalo de confiança de 95%, em pontos percentuais por unidade de AIOE.
-O mais forte é o deslocamento no gradiente. Ocupações de origem com uma unidade a mais de exposição tiveram, do pré para o pós, um aumento 2,19 pontos percentuais maior na transição para ocupação menos exposta, e uma variação 1,36 ponto percentual menor na transição para ocupação mais exposta. Em magnitude, 2,19 corresponde a cerca de 12,6% da taxa pós, que é de 17,4%. A leitura é literal: compara mudanças entre pré e pós de ocupações com exposições diferentes, e não acompanha uma mesma ocupação cuja exposição aumente.
-A mudança de ocupação também se associa à exposição: mais 0,86 ponto percentual em três dígitos e 0,28 em dois, o que sugere que parte do movimento adicional ocorre dentro das categorias de dois dígitos. Todos os intervalos excluem zero, exceto o do teste de atrito.
-Duas ressalvas são essenciais. Primeira: nas margens direcionais, parte do resultado é mecânica, porque origens mais expostas têm mais destinos abaixo delas, e o desenho atual não separa isso do gradiente. Segunda: são sete desfechos correlacionados, sem correção para multiplicidade. O coeficiente de dois dígitos, com p de 0,030, é o que menos resiste e não deve ser citado isoladamente.</a:t>
+              <a:t>[Slide 9 de 12 · RESOLUÇÃO · tempo previsto 1:30 · ao terminar, o relógio marca 11:00]
+E esta é a resposta principal. Cada ponto do gráfico é o beta de um desfecho, e a linha em volta é a margem de erro.
+[Aponte para o primeiro ponto do gráfico.] O resultado mais forte é a direção. Quanto mais exposta a ocupação de origem, mais as pessoas passaram a ir para ocupações menos expostas. Para cada unidade a mais de exposição, essa transição subiu cerca de 2,2 pontos percentuais a mais. Não é pouco: equivale a cerca de um oitavo da taxa do período depois do marco. [Aponte para o último ponto do gráfico.] E o movimento contrário, ir para uma ocupação mais exposta, ficou 1,4 ponto menor.
+Mudar de ocupação também ficou um pouco mais comum nas ocupações mais expostas, quase um ponto a mais.
+Agora, duas ressalvas, para ser honesto. A primeira: parte do resultado de direção é mecânica, porque quem já está no topo tem mais espaço para descer. A segunda: são sete testes ao mesmo tempo, sem correção para isso. O resultado mais fraco, o de mudança de ocupação em dois dígitos, não deve ser citado sozinho.</a:t>
             </a:r>
             <a:endParaRPr lang="en-US" dirty="0"/>
           </a:p>
@@ -2961,7 +2973,7 @@
           <a:lstStyle>
             <a:lvl1pPr algn="l" indent="0" marL="0">
               <a:buNone/>
-              <a:defRPr lang="en-US" sz="3400" b="1" dirty="0">
+              <a:defRPr lang="en-US" sz="3000" b="1" dirty="0">
                 <a:solidFill>
                   <a:schemeClr val="tx2"/>
                 </a:solidFill>
@@ -2973,14 +2985,14 @@
               <a:buNone/>
             </a:pPr>
             <a:r>
-              <a:rPr lang="en-US" sz="3400" b="1" dirty="0">
+              <a:rPr lang="en-US" sz="3000" b="1" dirty="0">
                 <a:solidFill>
                   <a:schemeClr val="tx2"/>
                 </a:solidFill>
               </a:rPr>
               <a:t>Título do slide</a:t>
             </a:r>
-            <a:endParaRPr lang="en-US" sz="3400" dirty="0"/>
+            <a:endParaRPr lang="en-US" sz="3000" dirty="0"/>
           </a:p>
         </p:txBody>
       </p:sp>
@@ -3247,7 +3259,7 @@
           <a:lstStyle>
             <a:lvl1pPr algn="l" indent="0" marL="0">
               <a:buNone/>
-              <a:defRPr lang="en-US" sz="3400" b="1" dirty="0">
+              <a:defRPr lang="en-US" sz="3000" b="1" dirty="0">
                 <a:solidFill>
                   <a:schemeClr val="bg1"/>
                 </a:solidFill>
@@ -3259,14 +3271,14 @@
               <a:buNone/>
             </a:pPr>
             <a:r>
-              <a:rPr lang="en-US" sz="3400" b="1" dirty="0">
+              <a:rPr lang="en-US" sz="3000" b="1" dirty="0">
                 <a:solidFill>
                   <a:schemeClr val="bg1"/>
                 </a:solidFill>
               </a:rPr>
               <a:t>Título do slide</a:t>
             </a:r>
-            <a:endParaRPr lang="en-US" sz="3400" dirty="0"/>
+            <a:endParaRPr lang="en-US" sz="3000" dirty="0"/>
           </a:p>
         </p:txBody>
       </p:sp>
@@ -3768,7 +3780,7 @@
         <p:spPr>
           <a:xfrm>
             <a:off x="822960" y="868680"/>
-            <a:ext cx="8229600" cy="274320"/>
+            <a:ext cx="8778240" cy="274320"/>
           </a:xfrm>
           <a:prstGeom prst="rect">
             <a:avLst/>
@@ -3780,7 +3792,7 @@
           <a:bodyPr wrap="square" lIns="0" tIns="0" rIns="0" bIns="0" rtlCol="0" anchor="ctr"/>
           <a:lstStyle/>
           <a:p>
-            <a:pPr indent="0" marL="0">
+            <a:pPr algn="l" indent="0" marL="0">
               <a:buNone/>
             </a:pPr>
             <a:r>
@@ -3892,7 +3904,7 @@
           <a:bodyPr wrap="square" lIns="0" tIns="0" rIns="0" bIns="0" rtlCol="0" anchor="t"/>
           <a:lstStyle/>
           <a:p>
-            <a:pPr indent="0" marL="0">
+            <a:pPr algn="l" indent="0" marL="0">
               <a:buNone/>
             </a:pPr>
             <a:r>
@@ -3906,7 +3918,7 @@
             <a:endParaRPr lang="en-US" sz="2000" dirty="0"/>
           </a:p>
           <a:p>
-            <a:pPr indent="0" marL="0">
+            <a:pPr algn="l" indent="0" marL="0">
               <a:buNone/>
             </a:pPr>
             <a:r>
@@ -3920,7 +3932,7 @@
             <a:endParaRPr lang="en-US" sz="2000" dirty="0"/>
           </a:p>
           <a:p>
-            <a:pPr indent="0" marL="0">
+            <a:pPr algn="l" indent="0" marL="0">
               <a:buNone/>
             </a:pPr>
             <a:r>
@@ -3987,14 +3999,14 @@
               <a:buNone/>
             </a:pPr>
             <a:r>
-              <a:rPr lang="en-US" sz="3400" b="1" dirty="0">
+              <a:rPr lang="en-US" sz="3000" b="1" dirty="0">
                 <a:solidFill>
                   <a:schemeClr val="tx2"/>
                 </a:solidFill>
               </a:rPr>
-              <a:t>Vínculo no emprego e teste de atrito</a:t>
-            </a:r>
-            <a:endParaRPr lang="en-US" sz="3400" dirty="0"/>
+              <a:t>Mais exposição veio com o vínculo no emprego preservado</a:t>
+            </a:r>
+            <a:endParaRPr lang="en-US" sz="3000" dirty="0"/>
           </a:p>
         </p:txBody>
       </p:sp>
@@ -4514,7 +4526,7 @@
                   <a:schemeClr val="bg1"/>
                 </a:solidFill>
               </a:rPr>
-              <a:t>Maior exposição se associa a menos saída do emprego e a menos informalização: o sinal oposto ao da leitura alarmista.</a:t>
+              <a:t>Mais exposição à IA, vínculo preservado: menos saída do emprego e menos informalização.</a:t>
             </a:r>
             <a:endParaRPr lang="en-US" sz="1900" dirty="0"/>
           </a:p>
@@ -4551,6 +4563,86 @@
                 </a:solidFill>
               </a:rPr>
               <a:t>Fonte: elaboração própria a partir da PNADC/IBGE. Efeitos em pontos percentuais por unidade do índice.</a:t>
+            </a:r>
+            <a:endParaRPr lang="en-US" sz="1100" dirty="0"/>
+          </a:p>
+        </p:txBody>
+      </p:sp>
+      <p:sp>
+        <p:nvSpPr>
+          <p:cNvPr id="16" name="Ato da história"/>
+          <p:cNvSpPr txBox="1"/>
+          <p:nvPr/>
+        </p:nvSpPr>
+        <p:spPr>
+          <a:xfrm>
+            <a:off x="6153912" y="91440"/>
+            <a:ext cx="5486400" cy="256032"/>
+          </a:xfrm>
+          <a:prstGeom prst="rect">
+            <a:avLst/>
+          </a:prstGeom>
+          <a:noFill/>
+          <a:ln/>
+        </p:spPr>
+        <p:txBody>
+          <a:bodyPr wrap="square" lIns="0" tIns="0" rIns="0" bIns="0" rtlCol="0" anchor="ctr"/>
+          <a:lstStyle/>
+          <a:p>
+            <a:pPr algn="r" indent="0" marL="0">
+              <a:buNone/>
+            </a:pPr>
+            <a:r>
+              <a:rPr lang="en-US" sz="1100" spc="150" kern="0" dirty="0">
+                <a:solidFill>
+                  <a:schemeClr val="accent6"/>
+                </a:solidFill>
+              </a:rPr>
+              <a:t>CONTEXTO</a:t>
+            </a:r>
+            <a:pPr algn="r" indent="0" marL="0">
+              <a:buNone/>
+            </a:pPr>
+            <a:r>
+              <a:rPr lang="en-US" sz="1100" spc="150" kern="0" dirty="0">
+                <a:solidFill>
+                  <a:schemeClr val="accent6"/>
+                </a:solidFill>
+              </a:rPr>
+              <a:t>   ·   </a:t>
+            </a:r>
+            <a:pPr algn="r" indent="0" marL="0">
+              <a:buNone/>
+            </a:pPr>
+            <a:r>
+              <a:rPr lang="en-US" sz="1100" spc="150" kern="0" dirty="0">
+                <a:solidFill>
+                  <a:schemeClr val="accent6"/>
+                </a:solidFill>
+              </a:rPr>
+              <a:t>TENSÃO</a:t>
+            </a:r>
+            <a:pPr algn="r" indent="0" marL="0">
+              <a:buNone/>
+            </a:pPr>
+            <a:r>
+              <a:rPr lang="en-US" sz="1100" spc="150" kern="0" dirty="0">
+                <a:solidFill>
+                  <a:schemeClr val="accent6"/>
+                </a:solidFill>
+              </a:rPr>
+              <a:t>   ·   </a:t>
+            </a:r>
+            <a:pPr algn="r" indent="0" marL="0">
+              <a:buNone/>
+            </a:pPr>
+            <a:r>
+              <a:rPr lang="en-US" sz="1100" b="1" spc="150" kern="0" dirty="0">
+                <a:solidFill>
+                  <a:schemeClr val="accent1"/>
+                </a:solidFill>
+              </a:rPr>
+              <a:t>● RESOLUÇÃO</a:t>
             </a:r>
             <a:endParaRPr lang="en-US" sz="1100" dirty="0"/>
           </a:p>
@@ -4653,14 +4745,14 @@
               <a:buNone/>
             </a:pPr>
             <a:r>
-              <a:rPr lang="en-US" sz="3400" b="1" dirty="0">
+              <a:rPr lang="en-US" sz="3000" b="1" dirty="0">
                 <a:solidFill>
                   <a:schemeClr val="tx2"/>
                 </a:solidFill>
               </a:rPr>
-              <a:t>O que o desenho permite e o que não permite</a:t>
-            </a:r>
-            <a:endParaRPr lang="en-US" sz="3400" dirty="0"/>
+              <a:t>Os dados mostram associação, ainda não causalidade</a:t>
+            </a:r>
+            <a:endParaRPr lang="en-US" sz="3000" dirty="0"/>
           </a:p>
         </p:txBody>
       </p:sp>
@@ -5043,6 +5135,86 @@
               <a:t>Seleção longitudinal e horizonte maior que um trimestre.</a:t>
             </a:r>
             <a:endParaRPr lang="en-US" sz="1800" dirty="0"/>
+          </a:p>
+        </p:txBody>
+      </p:sp>
+      <p:sp>
+        <p:nvSpPr>
+          <p:cNvPr id="11" name="Ato da história"/>
+          <p:cNvSpPr txBox="1"/>
+          <p:nvPr/>
+        </p:nvSpPr>
+        <p:spPr>
+          <a:xfrm>
+            <a:off x="6153912" y="91440"/>
+            <a:ext cx="5486400" cy="256032"/>
+          </a:xfrm>
+          <a:prstGeom prst="rect">
+            <a:avLst/>
+          </a:prstGeom>
+          <a:noFill/>
+          <a:ln/>
+        </p:spPr>
+        <p:txBody>
+          <a:bodyPr wrap="square" lIns="0" tIns="0" rIns="0" bIns="0" rtlCol="0" anchor="ctr"/>
+          <a:lstStyle/>
+          <a:p>
+            <a:pPr algn="r" indent="0" marL="0">
+              <a:buNone/>
+            </a:pPr>
+            <a:r>
+              <a:rPr lang="en-US" sz="1100" spc="150" kern="0" dirty="0">
+                <a:solidFill>
+                  <a:schemeClr val="accent6"/>
+                </a:solidFill>
+              </a:rPr>
+              <a:t>CONTEXTO</a:t>
+            </a:r>
+            <a:pPr algn="r" indent="0" marL="0">
+              <a:buNone/>
+            </a:pPr>
+            <a:r>
+              <a:rPr lang="en-US" sz="1100" spc="150" kern="0" dirty="0">
+                <a:solidFill>
+                  <a:schemeClr val="accent6"/>
+                </a:solidFill>
+              </a:rPr>
+              <a:t>   ·   </a:t>
+            </a:r>
+            <a:pPr algn="r" indent="0" marL="0">
+              <a:buNone/>
+            </a:pPr>
+            <a:r>
+              <a:rPr lang="en-US" sz="1100" spc="150" kern="0" dirty="0">
+                <a:solidFill>
+                  <a:schemeClr val="accent6"/>
+                </a:solidFill>
+              </a:rPr>
+              <a:t>TENSÃO</a:t>
+            </a:r>
+            <a:pPr algn="r" indent="0" marL="0">
+              <a:buNone/>
+            </a:pPr>
+            <a:r>
+              <a:rPr lang="en-US" sz="1100" spc="150" kern="0" dirty="0">
+                <a:solidFill>
+                  <a:schemeClr val="accent6"/>
+                </a:solidFill>
+              </a:rPr>
+              <a:t>   ·   </a:t>
+            </a:r>
+            <a:pPr algn="r" indent="0" marL="0">
+              <a:buNone/>
+            </a:pPr>
+            <a:r>
+              <a:rPr lang="en-US" sz="1100" b="1" spc="150" kern="0" dirty="0">
+                <a:solidFill>
+                  <a:schemeClr val="accent1"/>
+                </a:solidFill>
+              </a:rPr>
+              <a:t>● RESOLUÇÃO</a:t>
+            </a:r>
+            <a:endParaRPr lang="en-US" sz="1100" dirty="0"/>
           </a:p>
         </p:txBody>
       </p:sp>
@@ -5143,27 +5315,59 @@
               <a:buNone/>
             </a:pPr>
             <a:r>
-              <a:rPr lang="en-US" sz="3400" b="1" dirty="0">
+              <a:rPr lang="en-US" sz="3000" b="1" dirty="0">
                 <a:solidFill>
                   <a:schemeClr val="bg1"/>
                 </a:solidFill>
               </a:rPr>
-              <a:t>Conclusões e próximos passos</a:t>
-            </a:r>
-            <a:endParaRPr lang="en-US" sz="3400" dirty="0"/>
-          </a:p>
-        </p:txBody>
-      </p:sp>
-      <p:sp>
-        <p:nvSpPr>
-          <p:cNvPr id="3" name="Rótulo"/>
+              <a:t>Mudou a direção, não o vínculo; a causa segue em aberto</a:t>
+            </a:r>
+            <a:endParaRPr lang="en-US" sz="3000" dirty="0"/>
+          </a:p>
+        </p:txBody>
+      </p:sp>
+      <p:sp>
+        <p:nvSpPr>
+          <p:cNvPr id="3" name="Carta: Resolução"/>
+          <p:cNvSpPr/>
+          <p:nvPr/>
+        </p:nvSpPr>
+        <p:spPr>
+          <a:xfrm>
+            <a:off x="6382512" y="1371600"/>
+            <a:ext cx="5257800" cy="4114800"/>
+          </a:xfrm>
+          <a:prstGeom prst="rect">
+            <a:avLst>
+              <a:gd name="adj" fmla="val 2222"/>
+            </a:avLst>
+          </a:prstGeom>
+          <a:solidFill>
+            <a:schemeClr val="accent1"/>
+          </a:solidFill>
+          <a:ln/>
+        </p:spPr>
+        <p:txBody>
+          <a:bodyPr wrap="square" rtlCol="0" anchor="ctr"/>
+          <a:lstStyle/>
+          <a:p>
+            <a:pPr indent="0" marL="0">
+              <a:buNone/>
+            </a:pPr>
+            <a:endParaRPr lang="en-US" dirty="0"/>
+          </a:p>
+        </p:txBody>
+      </p:sp>
+      <p:sp>
+        <p:nvSpPr>
+          <p:cNvPr id="4" name="Rótulo"/>
           <p:cNvSpPr txBox="1"/>
           <p:nvPr/>
         </p:nvSpPr>
         <p:spPr>
           <a:xfrm>
-            <a:off x="6382512" y="1371600"/>
-            <a:ext cx="5120640" cy="274320"/>
+            <a:off x="6611112" y="1536192"/>
+            <a:ext cx="4846320" cy="274320"/>
           </a:xfrm>
           <a:prstGeom prst="rect">
             <a:avLst/>
@@ -5184,43 +5388,9 @@
                   <a:schemeClr val="accent4"/>
                 </a:solidFill>
               </a:rPr>
-              <a:t>TRÊS NÍVEIS DE RESPOSTA</a:t>
+              <a:t>RESOLUÇÃO · A RESPOSTA EM TRÊS NÍVEIS</a:t>
             </a:r>
             <a:endParaRPr lang="en-US" sz="1200" dirty="0"/>
-          </a:p>
-        </p:txBody>
-      </p:sp>
-      <p:sp>
-        <p:nvSpPr>
-          <p:cNvPr id="4" name="Nível: Descritivo"/>
-          <p:cNvSpPr/>
-          <p:nvPr/>
-        </p:nvSpPr>
-        <p:spPr>
-          <a:xfrm>
-            <a:off x="6382512" y="1737360"/>
-            <a:ext cx="5257800" cy="1143000"/>
-          </a:xfrm>
-          <a:prstGeom prst="rect">
-            <a:avLst>
-              <a:gd name="adj" fmla="val 8000"/>
-            </a:avLst>
-          </a:prstGeom>
-          <a:solidFill>
-            <a:schemeClr val="accent1">
-              <a:alpha val="65000"/>
-            </a:schemeClr>
-          </a:solidFill>
-          <a:ln/>
-        </p:spPr>
-        <p:txBody>
-          <a:bodyPr wrap="square" rtlCol="0" anchor="ctr"/>
-          <a:lstStyle/>
-          <a:p>
-            <a:pPr indent="0" marL="0">
-              <a:buNone/>
-            </a:pPr>
-            <a:endParaRPr lang="en-US" dirty="0"/>
           </a:p>
         </p:txBody>
       </p:sp>
@@ -5232,7 +5402,7 @@
         </p:nvSpPr>
         <p:spPr>
           <a:xfrm>
-            <a:off x="6565392" y="2034540"/>
+            <a:off x="6611112" y="2148840"/>
             <a:ext cx="548640" cy="548640"/>
           </a:xfrm>
           <a:prstGeom prst="ellipse">
@@ -5270,8 +5440,8 @@
         </p:nvSpPr>
         <p:spPr>
           <a:xfrm>
-            <a:off x="7296912" y="1828800"/>
-            <a:ext cx="4206240" cy="960120"/>
+            <a:off x="7342632" y="1920240"/>
+            <a:ext cx="4114800" cy="1005840"/>
           </a:xfrm>
           <a:prstGeom prst="rect">
             <a:avLst/>
@@ -5301,9 +5471,9 @@
               <a:buNone/>
             </a:pPr>
             <a:r>
-              <a:rPr lang="en-US" sz="1400" dirty="0">
-                <a:solidFill>
-                  <a:schemeClr val="accent4"/>
+              <a:rPr lang="en-US" sz="1500" dirty="0">
+                <a:solidFill>
+                  <a:schemeClr val="bg1"/>
                 </a:solidFill>
               </a:rPr>
               <a:t>A mobilidade subiu para todos, e não só para os mais expostos.</a:t>
@@ -5314,47 +5484,13 @@
       </p:sp>
       <p:sp>
         <p:nvSpPr>
-          <p:cNvPr id="7" name="Nível: Associação condicional"/>
+          <p:cNvPr id="7" name="Marca: Associação condicional"/>
           <p:cNvSpPr/>
           <p:nvPr/>
         </p:nvSpPr>
         <p:spPr>
           <a:xfrm>
-            <a:off x="6382512" y="2999232"/>
-            <a:ext cx="5257800" cy="1143000"/>
-          </a:xfrm>
-          <a:prstGeom prst="rect">
-            <a:avLst>
-              <a:gd name="adj" fmla="val 8000"/>
-            </a:avLst>
-          </a:prstGeom>
-          <a:solidFill>
-            <a:schemeClr val="accent1">
-              <a:alpha val="65000"/>
-            </a:schemeClr>
-          </a:solidFill>
-          <a:ln/>
-        </p:spPr>
-        <p:txBody>
-          <a:bodyPr wrap="square" rtlCol="0" anchor="ctr"/>
-          <a:lstStyle/>
-          <a:p>
-            <a:pPr indent="0" marL="0">
-              <a:buNone/>
-            </a:pPr>
-            <a:endParaRPr lang="en-US" dirty="0"/>
-          </a:p>
-        </p:txBody>
-      </p:sp>
-      <p:sp>
-        <p:nvSpPr>
-          <p:cNvPr id="8" name="Marca: Associação condicional"/>
-          <p:cNvSpPr/>
-          <p:nvPr/>
-        </p:nvSpPr>
-        <p:spPr>
-          <a:xfrm>
-            <a:off x="6565392" y="3296412"/>
+            <a:off x="6611112" y="3319272"/>
             <a:ext cx="548640" cy="548640"/>
           </a:xfrm>
           <a:prstGeom prst="ellipse">
@@ -5386,14 +5522,14 @@
       </p:sp>
       <p:sp>
         <p:nvSpPr>
-          <p:cNvPr id="9" name="Texto: Associação condicional"/>
+          <p:cNvPr id="8" name="Texto: Associação condicional"/>
           <p:cNvSpPr txBox="1"/>
           <p:nvPr/>
         </p:nvSpPr>
         <p:spPr>
           <a:xfrm>
-            <a:off x="7296912" y="3090672"/>
-            <a:ext cx="4206240" cy="960120"/>
+            <a:off x="7342632" y="3090672"/>
+            <a:ext cx="4114800" cy="1005840"/>
           </a:xfrm>
           <a:prstGeom prst="rect">
             <a:avLst/>
@@ -5423,9 +5559,9 @@
               <a:buNone/>
             </a:pPr>
             <a:r>
-              <a:rPr lang="en-US" sz="1400" dirty="0">
-                <a:solidFill>
-                  <a:schemeClr val="accent4"/>
+              <a:rPr lang="en-US" sz="1500" dirty="0">
+                <a:solidFill>
+                  <a:schemeClr val="bg1"/>
                 </a:solidFill>
               </a:rPr>
               <a:t>Gradiente detectável, da ordem de 2 p.p. por unidade de AIOE. Vínculo sem deterioração.</a:t>
@@ -5436,47 +5572,13 @@
       </p:sp>
       <p:sp>
         <p:nvSpPr>
-          <p:cNvPr id="10" name="Nível: Causal"/>
+          <p:cNvPr id="9" name="Marca: Causal"/>
           <p:cNvSpPr/>
           <p:nvPr/>
         </p:nvSpPr>
         <p:spPr>
           <a:xfrm>
-            <a:off x="6382512" y="4261104"/>
-            <a:ext cx="5257800" cy="1143000"/>
-          </a:xfrm>
-          <a:prstGeom prst="rect">
-            <a:avLst>
-              <a:gd name="adj" fmla="val 8000"/>
-            </a:avLst>
-          </a:prstGeom>
-          <a:solidFill>
-            <a:schemeClr val="accent1">
-              <a:alpha val="65000"/>
-            </a:schemeClr>
-          </a:solidFill>
-          <a:ln/>
-        </p:spPr>
-        <p:txBody>
-          <a:bodyPr wrap="square" rtlCol="0" anchor="ctr"/>
-          <a:lstStyle/>
-          <a:p>
-            <a:pPr indent="0" marL="0">
-              <a:buNone/>
-            </a:pPr>
-            <a:endParaRPr lang="en-US" dirty="0"/>
-          </a:p>
-        </p:txBody>
-      </p:sp>
-      <p:sp>
-        <p:nvSpPr>
-          <p:cNvPr id="11" name="Marca: Causal"/>
-          <p:cNvSpPr/>
-          <p:nvPr/>
-        </p:nvSpPr>
-        <p:spPr>
-          <a:xfrm>
-            <a:off x="6565392" y="4558284"/>
+            <a:off x="6611112" y="4489704"/>
             <a:ext cx="548640" cy="548640"/>
           </a:xfrm>
           <a:prstGeom prst="ellipse">
@@ -5508,14 +5610,14 @@
       </p:sp>
       <p:sp>
         <p:nvSpPr>
-          <p:cNvPr id="12" name="Texto: Causal"/>
+          <p:cNvPr id="10" name="Texto: Causal"/>
           <p:cNvSpPr txBox="1"/>
           <p:nvPr/>
         </p:nvSpPr>
         <p:spPr>
           <a:xfrm>
-            <a:off x="7296912" y="4352544"/>
-            <a:ext cx="4206240" cy="960120"/>
+            <a:off x="7342632" y="4261104"/>
+            <a:ext cx="4114800" cy="1005840"/>
           </a:xfrm>
           <a:prstGeom prst="rect">
             <a:avLst/>
@@ -5545,9 +5647,9 @@
               <a:buNone/>
             </a:pPr>
             <a:r>
-              <a:rPr lang="en-US" sz="1400" dirty="0">
-                <a:solidFill>
-                  <a:schemeClr val="accent4"/>
+              <a:rPr lang="en-US" sz="1500" dirty="0">
+                <a:solidFill>
+                  <a:schemeClr val="bg1"/>
                 </a:solidFill>
               </a:rPr>
               <a:t>O desenho atual não sustenta a afirmação.</a:t>
@@ -5558,7 +5660,7 @@
       </p:sp>
       <p:sp>
         <p:nvSpPr>
-          <p:cNvPr id="13" name="Rótulo"/>
+          <p:cNvPr id="11" name="Rótulo"/>
           <p:cNvSpPr txBox="1"/>
           <p:nvPr/>
         </p:nvSpPr>
@@ -5594,7 +5696,7 @@
       </p:sp>
       <p:sp>
         <p:nvSpPr>
-          <p:cNvPr id="14" name="Passo 1"/>
+          <p:cNvPr id="12" name="Passo 1"/>
           <p:cNvSpPr/>
           <p:nvPr/>
         </p:nvSpPr>
@@ -5632,7 +5734,7 @@
       </p:sp>
       <p:sp>
         <p:nvSpPr>
-          <p:cNvPr id="15" name="Passo 1 (texto)"/>
+          <p:cNvPr id="13" name="Passo 1 (texto)"/>
           <p:cNvSpPr txBox="1"/>
           <p:nvPr/>
         </p:nvSpPr>
@@ -5668,7 +5770,7 @@
       </p:sp>
       <p:sp>
         <p:nvSpPr>
-          <p:cNvPr id="16" name="Passo 2"/>
+          <p:cNvPr id="14" name="Passo 2"/>
           <p:cNvSpPr/>
           <p:nvPr/>
         </p:nvSpPr>
@@ -5706,7 +5808,7 @@
       </p:sp>
       <p:sp>
         <p:nvSpPr>
-          <p:cNvPr id="17" name="Passo 2 (texto)"/>
+          <p:cNvPr id="15" name="Passo 2 (texto)"/>
           <p:cNvSpPr txBox="1"/>
           <p:nvPr/>
         </p:nvSpPr>
@@ -5742,7 +5844,7 @@
       </p:sp>
       <p:sp>
         <p:nvSpPr>
-          <p:cNvPr id="18" name="Passo 3"/>
+          <p:cNvPr id="16" name="Passo 3"/>
           <p:cNvSpPr/>
           <p:nvPr/>
         </p:nvSpPr>
@@ -5780,7 +5882,7 @@
       </p:sp>
       <p:sp>
         <p:nvSpPr>
-          <p:cNvPr id="19" name="Passo 3 (texto)"/>
+          <p:cNvPr id="17" name="Passo 3 (texto)"/>
           <p:cNvSpPr txBox="1"/>
           <p:nvPr/>
         </p:nvSpPr>
@@ -5816,7 +5918,7 @@
       </p:sp>
       <p:sp>
         <p:nvSpPr>
-          <p:cNvPr id="20" name="Passo 4"/>
+          <p:cNvPr id="18" name="Passo 4"/>
           <p:cNvSpPr/>
           <p:nvPr/>
         </p:nvSpPr>
@@ -5854,7 +5956,7 @@
       </p:sp>
       <p:sp>
         <p:nvSpPr>
-          <p:cNvPr id="21" name="Passo 4 (texto)"/>
+          <p:cNvPr id="19" name="Passo 4 (texto)"/>
           <p:cNvSpPr txBox="1"/>
           <p:nvPr/>
         </p:nvSpPr>
@@ -5890,7 +5992,7 @@
       </p:sp>
       <p:sp>
         <p:nvSpPr>
-          <p:cNvPr id="22" name="Passo 5"/>
+          <p:cNvPr id="20" name="Passo 5"/>
           <p:cNvSpPr/>
           <p:nvPr/>
         </p:nvSpPr>
@@ -5928,7 +6030,7 @@
       </p:sp>
       <p:sp>
         <p:nvSpPr>
-          <p:cNvPr id="23" name="Passo 5 (texto)"/>
+          <p:cNvPr id="21" name="Passo 5 (texto)"/>
           <p:cNvSpPr txBox="1"/>
           <p:nvPr/>
         </p:nvSpPr>
@@ -5964,7 +6066,7 @@
       </p:sp>
       <p:sp>
         <p:nvSpPr>
-          <p:cNvPr id="24" name="Extensões"/>
+          <p:cNvPr id="22" name="Extensões"/>
           <p:cNvSpPr txBox="1"/>
           <p:nvPr/>
         </p:nvSpPr>
@@ -6000,7 +6102,7 @@
       </p:sp>
       <p:sp>
         <p:nvSpPr>
-          <p:cNvPr id="25" name="Agradecimento"/>
+          <p:cNvPr id="23" name="Agradecimento"/>
           <p:cNvSpPr txBox="1"/>
           <p:nvPr/>
         </p:nvSpPr>
@@ -6034,6 +6136,86 @@
               <a:t>Obrigado. Perguntas?</a:t>
             </a:r>
             <a:endParaRPr lang="en-US" sz="2800" dirty="0"/>
+          </a:p>
+        </p:txBody>
+      </p:sp>
+      <p:sp>
+        <p:nvSpPr>
+          <p:cNvPr id="24" name="Ato da história"/>
+          <p:cNvSpPr txBox="1"/>
+          <p:nvPr/>
+        </p:nvSpPr>
+        <p:spPr>
+          <a:xfrm>
+            <a:off x="6153912" y="91440"/>
+            <a:ext cx="5486400" cy="256032"/>
+          </a:xfrm>
+          <a:prstGeom prst="rect">
+            <a:avLst/>
+          </a:prstGeom>
+          <a:noFill/>
+          <a:ln/>
+        </p:spPr>
+        <p:txBody>
+          <a:bodyPr wrap="square" lIns="0" tIns="0" rIns="0" bIns="0" rtlCol="0" anchor="ctr"/>
+          <a:lstStyle/>
+          <a:p>
+            <a:pPr algn="r" indent="0" marL="0">
+              <a:buNone/>
+            </a:pPr>
+            <a:r>
+              <a:rPr lang="en-US" sz="1100" spc="150" kern="0" dirty="0">
+                <a:solidFill>
+                  <a:schemeClr val="accent4"/>
+                </a:solidFill>
+              </a:rPr>
+              <a:t>CONTEXTO</a:t>
+            </a:r>
+            <a:pPr algn="r" indent="0" marL="0">
+              <a:buNone/>
+            </a:pPr>
+            <a:r>
+              <a:rPr lang="en-US" sz="1100" spc="150" kern="0" dirty="0">
+                <a:solidFill>
+                  <a:schemeClr val="accent4"/>
+                </a:solidFill>
+              </a:rPr>
+              <a:t>   ·   </a:t>
+            </a:r>
+            <a:pPr algn="r" indent="0" marL="0">
+              <a:buNone/>
+            </a:pPr>
+            <a:r>
+              <a:rPr lang="en-US" sz="1100" spc="150" kern="0" dirty="0">
+                <a:solidFill>
+                  <a:schemeClr val="accent4"/>
+                </a:solidFill>
+              </a:rPr>
+              <a:t>TENSÃO</a:t>
+            </a:r>
+            <a:pPr algn="r" indent="0" marL="0">
+              <a:buNone/>
+            </a:pPr>
+            <a:r>
+              <a:rPr lang="en-US" sz="1100" spc="150" kern="0" dirty="0">
+                <a:solidFill>
+                  <a:schemeClr val="accent4"/>
+                </a:solidFill>
+              </a:rPr>
+              <a:t>   ·   </a:t>
+            </a:r>
+            <a:pPr algn="r" indent="0" marL="0">
+              <a:buNone/>
+            </a:pPr>
+            <a:r>
+              <a:rPr lang="en-US" sz="1100" b="1" spc="150" kern="0" dirty="0">
+                <a:solidFill>
+                  <a:schemeClr val="bg1"/>
+                </a:solidFill>
+              </a:rPr>
+              <a:t>● RESOLUÇÃO</a:t>
+            </a:r>
+            <a:endParaRPr lang="en-US" sz="1100" dirty="0"/>
           </a:p>
         </p:txBody>
       </p:sp>
@@ -6134,35 +6316,35 @@
               <a:buNone/>
             </a:pPr>
             <a:r>
-              <a:rPr lang="en-US" sz="3400" b="1" dirty="0">
+              <a:rPr lang="en-US" sz="3000" b="1" dirty="0">
                 <a:solidFill>
                   <a:schemeClr val="tx2"/>
                 </a:solidFill>
               </a:rPr>
-              <a:t>A pergunta de pesquisa</a:t>
-            </a:r>
-            <a:endParaRPr lang="en-US" sz="3400" dirty="0"/>
-          </a:p>
-        </p:txBody>
-      </p:sp>
-      <p:sp>
-        <p:nvSpPr>
-          <p:cNvPr id="3" name="Pergunta de pesquisa"/>
+              <a:t>A IA chegou para todos no mesmo dia. O trabalho mudou?</a:t>
+            </a:r>
+            <a:endParaRPr lang="en-US" sz="3000" dirty="0"/>
+          </a:p>
+        </p:txBody>
+      </p:sp>
+      <p:sp>
+        <p:nvSpPr>
+          <p:cNvPr id="3" name="Carta: Contexto"/>
           <p:cNvSpPr/>
           <p:nvPr/>
         </p:nvSpPr>
         <p:spPr>
           <a:xfrm>
-            <a:off x="548640" y="1417320"/>
-            <a:ext cx="11091672" cy="1508760"/>
+            <a:off x="548640" y="1371600"/>
+            <a:ext cx="11091672" cy="960120"/>
           </a:xfrm>
           <a:prstGeom prst="rect">
             <a:avLst>
-              <a:gd name="adj" fmla="val 6061"/>
+              <a:gd name="adj" fmla="val 9524"/>
             </a:avLst>
           </a:prstGeom>
           <a:solidFill>
-            <a:schemeClr val="bg2"/>
+            <a:schemeClr val="accent2"/>
           </a:solidFill>
           <a:ln/>
         </p:spPr>
@@ -6171,10 +6353,102 @@
           <a:lstStyle/>
           <a:p>
             <a:pPr indent="0" marL="0">
-              <a:buNone/>
-            </a:pPr>
-            <a:r>
-              <a:rPr lang="en-US" sz="2800" i="1" dirty="0">
+              <a:spcAft>
+                <a:spcPts val="400"/>
+              </a:spcAft>
+              <a:buNone/>
+            </a:pPr>
+            <a:r>
+              <a:rPr lang="en-US" sz="1300" b="1" spc="300" kern="0" dirty="0">
+                <a:solidFill>
+                  <a:schemeClr val="accent4"/>
+                </a:solidFill>
+              </a:rPr>
+              <a:t>CONTEXTO</a:t>
+            </a:r>
+            <a:endParaRPr lang="en-US" sz="1300" dirty="0"/>
+          </a:p>
+          <a:p>
+            <a:pPr indent="0" marL="0">
+              <a:spcAft>
+                <a:spcPts val="400"/>
+              </a:spcAft>
+              <a:buNone/>
+            </a:pPr>
+            <a:r>
+              <a:rPr lang="en-US" sz="1900" dirty="0">
+                <a:solidFill>
+                  <a:schemeClr val="bg1"/>
+                </a:solidFill>
+              </a:rPr>
+              <a:t>Em 30/11/2022, o ChatGPT chegou ao público: uma IA que escreve, resume e programa ficou ao alcance de qualquer trabalhador.</a:t>
+            </a:r>
+            <a:endParaRPr lang="en-US" sz="1300" dirty="0"/>
+          </a:p>
+        </p:txBody>
+      </p:sp>
+      <p:sp>
+        <p:nvSpPr>
+          <p:cNvPr id="4" name="Rótulo"/>
+          <p:cNvSpPr txBox="1"/>
+          <p:nvPr/>
+        </p:nvSpPr>
+        <p:spPr>
+          <a:xfrm>
+            <a:off x="548640" y="2450592"/>
+            <a:ext cx="3657600" cy="274320"/>
+          </a:xfrm>
+          <a:prstGeom prst="rect">
+            <a:avLst/>
+          </a:prstGeom>
+          <a:noFill/>
+          <a:ln/>
+        </p:spPr>
+        <p:txBody>
+          <a:bodyPr wrap="square" lIns="0" tIns="0" rIns="0" bIns="0" rtlCol="0" anchor="ctr"/>
+          <a:lstStyle/>
+          <a:p>
+            <a:pPr indent="0" marL="0">
+              <a:buNone/>
+            </a:pPr>
+            <a:r>
+              <a:rPr lang="en-US" sz="1200" b="1" spc="200" kern="0" dirty="0">
+                <a:solidFill>
+                  <a:schemeClr val="accent1"/>
+                </a:solidFill>
+              </a:rPr>
+              <a:t>A PERGUNTA</a:t>
+            </a:r>
+            <a:endParaRPr lang="en-US" sz="1200" dirty="0"/>
+          </a:p>
+        </p:txBody>
+      </p:sp>
+      <p:sp>
+        <p:nvSpPr>
+          <p:cNvPr id="5" name="Pergunta de pesquisa"/>
+          <p:cNvSpPr txBox="1"/>
+          <p:nvPr/>
+        </p:nvSpPr>
+        <p:spPr>
+          <a:xfrm>
+            <a:off x="548640" y="2697480"/>
+            <a:ext cx="11091672" cy="685800"/>
+          </a:xfrm>
+          <a:prstGeom prst="rect">
+            <a:avLst/>
+          </a:prstGeom>
+          <a:noFill/>
+          <a:ln/>
+        </p:spPr>
+        <p:txBody>
+          <a:bodyPr wrap="square" lIns="0" tIns="0" rIns="0" bIns="0" rtlCol="0" anchor="t"/>
+          <a:lstStyle/>
+          <a:p>
+            <a:pPr indent="0" marL="0">
+              <a:buNone/>
+            </a:pPr>
+            <a:r>
+              <a:rPr lang="en-US" sz="2200" i="1" dirty="0">
                 <a:solidFill>
                   <a:schemeClr val="tx2"/>
                 </a:solidFill>
@@ -6182,7 +6456,45 @@
                 <a:ea typeface="+mj-lt" pitchFamily="34" charset="-122"/>
                 <a:cs typeface="+mj-lt" pitchFamily="34" charset="-120"/>
               </a:rPr>
-              <a:t>Trabalhadores em ocupações mais expostas à inteligência artificial passaram a apresentar transições de trabalho distintas depois do lançamento do ChatGPT?</a:t>
+              <a:t>Quem trabalha em ocupações mais expostas à IA passou a mudar de trabalho de um jeito diferente depois desse marco?</a:t>
+            </a:r>
+            <a:endParaRPr lang="en-US" sz="2200" dirty="0"/>
+          </a:p>
+        </p:txBody>
+      </p:sp>
+      <p:sp>
+        <p:nvSpPr>
+          <p:cNvPr id="6" name="Período pré"/>
+          <p:cNvSpPr/>
+          <p:nvPr/>
+        </p:nvSpPr>
+        <p:spPr>
+          <a:xfrm>
+            <a:off x="548640" y="3840480"/>
+            <a:ext cx="6162040" cy="420624"/>
+          </a:xfrm>
+          <a:prstGeom prst="rect">
+            <a:avLst/>
+          </a:prstGeom>
+          <a:solidFill>
+            <a:schemeClr val="accent4"/>
+          </a:solidFill>
+          <a:ln/>
+        </p:spPr>
+        <p:txBody>
+          <a:bodyPr wrap="square" lIns="0" tIns="0" rIns="0" bIns="0" rtlCol="0" anchor="ctr"/>
+          <a:lstStyle/>
+          <a:p>
+            <a:pPr algn="ctr" indent="0" marL="0">
+              <a:buNone/>
+            </a:pPr>
+            <a:r>
+              <a:rPr lang="en-US" sz="1400" b="1" dirty="0">
+                <a:solidFill>
+                  <a:schemeClr val="tx2"/>
+                </a:solidFill>
+              </a:rPr>
+              <a:t>ANTES · 15 trimestres</a:t>
             </a:r>
             <a:endParaRPr lang="en-US" sz="1400" dirty="0"/>
           </a:p>
@@ -6190,52 +6502,14 @@
       </p:sp>
       <p:sp>
         <p:nvSpPr>
-          <p:cNvPr id="4" name="Período pré"/>
+          <p:cNvPr id="7" name="Período pós"/>
           <p:cNvSpPr/>
           <p:nvPr/>
         </p:nvSpPr>
         <p:spPr>
           <a:xfrm>
-            <a:off x="548640" y="3703320"/>
-            <a:ext cx="6162040" cy="502920"/>
-          </a:xfrm>
-          <a:prstGeom prst="rect">
-            <a:avLst/>
-          </a:prstGeom>
-          <a:solidFill>
-            <a:schemeClr val="accent3"/>
-          </a:solidFill>
-          <a:ln/>
-        </p:spPr>
-        <p:txBody>
-          <a:bodyPr wrap="square" lIns="0" tIns="0" rIns="0" bIns="0" rtlCol="0" anchor="ctr"/>
-          <a:lstStyle/>
-          <a:p>
-            <a:pPr algn="ctr" indent="0" marL="0">
-              <a:buNone/>
-            </a:pPr>
-            <a:r>
-              <a:rPr lang="en-US" sz="1400" b="1" dirty="0">
-                <a:solidFill>
-                  <a:schemeClr val="bg1"/>
-                </a:solidFill>
-              </a:rPr>
-              <a:t>PRÉ · 15 trimestres de origem</a:t>
-            </a:r>
-            <a:endParaRPr lang="en-US" sz="1400" dirty="0"/>
-          </a:p>
-        </p:txBody>
-      </p:sp>
-      <p:sp>
-        <p:nvSpPr>
-          <p:cNvPr id="5" name="Período pós"/>
-          <p:cNvSpPr/>
-          <p:nvPr/>
-        </p:nvSpPr>
-        <p:spPr>
-          <a:xfrm>
-            <a:off x="6710680" y="3703320"/>
-            <a:ext cx="4929632" cy="502920"/>
+            <a:off x="6710680" y="3840480"/>
+            <a:ext cx="4929632" cy="420624"/>
           </a:xfrm>
           <a:prstGeom prst="rect">
             <a:avLst/>
@@ -6258,7 +6532,7 @@
                   <a:schemeClr val="bg1"/>
                 </a:solidFill>
               </a:rPr>
-              <a:t>PÓS · 12 trimestres de origem</a:t>
+              <a:t>DEPOIS · 12 trimestres</a:t>
             </a:r>
             <a:endParaRPr lang="en-US" sz="1400" dirty="0"/>
           </a:p>
@@ -6266,14 +6540,14 @@
       </p:sp>
       <p:sp>
         <p:nvSpPr>
-          <p:cNvPr id="6" name="Marco"/>
+          <p:cNvPr id="8" name="Marco"/>
           <p:cNvSpPr/>
           <p:nvPr/>
         </p:nvSpPr>
         <p:spPr>
           <a:xfrm>
-            <a:off x="6710680" y="3364992"/>
-            <a:ext cx="0" cy="987552"/>
+            <a:off x="6710680" y="3749040"/>
+            <a:ext cx="0" cy="621792"/>
           </a:xfrm>
           <a:prstGeom prst="line">
             <a:avLst/>
@@ -6289,14 +6563,14 @@
       </p:sp>
       <p:sp>
         <p:nvSpPr>
-          <p:cNvPr id="7" name="Rótulo do marco"/>
+          <p:cNvPr id="9" name="Rótulo do marco"/>
           <p:cNvSpPr txBox="1"/>
           <p:nvPr/>
         </p:nvSpPr>
         <p:spPr>
           <a:xfrm>
-            <a:off x="4333240" y="3108960"/>
-            <a:ext cx="4754880" cy="274320"/>
+            <a:off x="4333240" y="3511296"/>
+            <a:ext cx="4754880" cy="237744"/>
           </a:xfrm>
           <a:prstGeom prst="rect">
             <a:avLst/>
@@ -6312,86 +6586,14 @@
               <a:buNone/>
             </a:pPr>
             <a:r>
-              <a:rPr lang="en-US" sz="1400" b="1" dirty="0">
+              <a:rPr lang="en-US" sz="1300" b="1" dirty="0">
                 <a:solidFill>
                   <a:schemeClr val="tx2"/>
                 </a:solidFill>
               </a:rPr>
-              <a:t>30/11/2022 · lançamento público do ChatGPT</a:t>
-            </a:r>
-            <a:endParaRPr lang="en-US" sz="1400" dirty="0"/>
-          </a:p>
-        </p:txBody>
-      </p:sp>
-      <p:sp>
-        <p:nvSpPr>
-          <p:cNvPr id="8" name="Text 6"/>
-          <p:cNvSpPr txBox="1"/>
-          <p:nvPr/>
-        </p:nvSpPr>
-        <p:spPr>
-          <a:xfrm>
-            <a:off x="548640" y="4261104"/>
-            <a:ext cx="1371600" cy="256032"/>
-          </a:xfrm>
-          <a:prstGeom prst="rect">
-            <a:avLst/>
-          </a:prstGeom>
-          <a:noFill/>
-          <a:ln/>
-        </p:spPr>
-        <p:txBody>
-          <a:bodyPr wrap="square" lIns="0" tIns="0" rIns="0" bIns="0" rtlCol="0" anchor="ctr"/>
-          <a:lstStyle/>
-          <a:p>
-            <a:pPr indent="0" marL="0">
-              <a:buNone/>
-            </a:pPr>
-            <a:r>
-              <a:rPr lang="en-US" sz="1200" dirty="0">
-                <a:solidFill>
-                  <a:schemeClr val="accent6"/>
-                </a:solidFill>
-              </a:rPr>
-              <a:t>2019T1</a:t>
-            </a:r>
-            <a:endParaRPr lang="en-US" sz="1200" dirty="0"/>
-          </a:p>
-        </p:txBody>
-      </p:sp>
-      <p:sp>
-        <p:nvSpPr>
-          <p:cNvPr id="9" name="Text 7"/>
-          <p:cNvSpPr txBox="1"/>
-          <p:nvPr/>
-        </p:nvSpPr>
-        <p:spPr>
-          <a:xfrm>
-            <a:off x="5613400" y="4261104"/>
-            <a:ext cx="2194560" cy="256032"/>
-          </a:xfrm>
-          <a:prstGeom prst="rect">
-            <a:avLst/>
-          </a:prstGeom>
-          <a:noFill/>
-          <a:ln/>
-        </p:spPr>
-        <p:txBody>
-          <a:bodyPr wrap="square" lIns="0" tIns="0" rIns="0" bIns="0" rtlCol="0" anchor="ctr"/>
-          <a:lstStyle/>
-          <a:p>
-            <a:pPr algn="ctr" indent="0" marL="0">
-              <a:buNone/>
-            </a:pPr>
-            <a:r>
-              <a:rPr lang="en-US" sz="1200" dirty="0">
-                <a:solidFill>
-                  <a:schemeClr val="accent6"/>
-                </a:solidFill>
-              </a:rPr>
-              <a:t>2022T3 | 2022T4</a:t>
-            </a:r>
-            <a:endParaRPr lang="en-US" sz="1200" dirty="0"/>
+              <a:t>30/11/2022 · ChatGPT</a:t>
+            </a:r>
+            <a:endParaRPr lang="en-US" sz="1300" dirty="0"/>
           </a:p>
         </p:txBody>
       </p:sp>
@@ -6403,8 +6605,8 @@
         </p:nvSpPr>
         <p:spPr>
           <a:xfrm>
-            <a:off x="10268712" y="4261104"/>
-            <a:ext cx="1371600" cy="256032"/>
+            <a:off x="548640" y="4297680"/>
+            <a:ext cx="1371600" cy="237744"/>
           </a:xfrm>
           <a:prstGeom prst="rect">
             <a:avLst/>
@@ -6416,6 +6618,42 @@
           <a:bodyPr wrap="square" lIns="0" tIns="0" rIns="0" bIns="0" rtlCol="0" anchor="ctr"/>
           <a:lstStyle/>
           <a:p>
+            <a:pPr indent="0" marL="0">
+              <a:buNone/>
+            </a:pPr>
+            <a:r>
+              <a:rPr lang="en-US" sz="1200" dirty="0">
+                <a:solidFill>
+                  <a:schemeClr val="accent6"/>
+                </a:solidFill>
+              </a:rPr>
+              <a:t>2019</a:t>
+            </a:r>
+            <a:endParaRPr lang="en-US" sz="1200" dirty="0"/>
+          </a:p>
+        </p:txBody>
+      </p:sp>
+      <p:sp>
+        <p:nvSpPr>
+          <p:cNvPr id="11" name="Text 9"/>
+          <p:cNvSpPr txBox="1"/>
+          <p:nvPr/>
+        </p:nvSpPr>
+        <p:spPr>
+          <a:xfrm>
+            <a:off x="10268712" y="4297680"/>
+            <a:ext cx="1371600" cy="237744"/>
+          </a:xfrm>
+          <a:prstGeom prst="rect">
+            <a:avLst/>
+          </a:prstGeom>
+          <a:noFill/>
+          <a:ln/>
+        </p:spPr>
+        <p:txBody>
+          <a:bodyPr wrap="square" lIns="0" tIns="0" rIns="0" bIns="0" rtlCol="0" anchor="ctr"/>
+          <a:lstStyle/>
+          <a:p>
             <a:pPr algn="r" indent="0" marL="0">
               <a:buNone/>
             </a:pPr>
@@ -6425,7 +6663,7 @@
                   <a:schemeClr val="accent6"/>
                 </a:solidFill>
               </a:rPr>
-              <a:t>2025T3</a:t>
+              <a:t>2025</a:t>
             </a:r>
             <a:endParaRPr lang="en-US" sz="1200" dirty="0"/>
           </a:p>
@@ -6433,18 +6671,18 @@
       </p:sp>
       <p:sp>
         <p:nvSpPr>
-          <p:cNvPr id="11" name="Definição: Exposição"/>
+          <p:cNvPr id="12" name="Definição: Exposição"/>
           <p:cNvSpPr/>
           <p:nvPr/>
         </p:nvSpPr>
         <p:spPr>
           <a:xfrm>
             <a:off x="548640" y="4709160"/>
-            <a:ext cx="3563112" cy="1325880"/>
+            <a:ext cx="3563112" cy="1188720"/>
           </a:xfrm>
           <a:prstGeom prst="rect">
             <a:avLst>
-              <a:gd name="adj" fmla="val 6897"/>
+              <a:gd name="adj" fmla="val 7692"/>
             </a:avLst>
           </a:prstGeom>
           <a:solidFill>
@@ -6479,7 +6717,7 @@
                   <a:schemeClr val="tx1"/>
                 </a:solidFill>
               </a:rPr>
-              <a:t>Propriedade da ocupação, medida por um índice. Não é adoção de IA nem risco de demissão.</a:t>
+              <a:t>Quanto as tarefas da ocupação se parecem com o que a IA faz. Não é uso de IA nem risco de demissão.</a:t>
             </a:r>
             <a:endParaRPr lang="en-US" sz="1400" dirty="0"/>
           </a:p>
@@ -6487,18 +6725,18 @@
       </p:sp>
       <p:sp>
         <p:nvSpPr>
-          <p:cNvPr id="12" name="Definição: Transição"/>
+          <p:cNvPr id="13" name="Definição: Transição"/>
           <p:cNvSpPr/>
           <p:nvPr/>
         </p:nvSpPr>
         <p:spPr>
           <a:xfrm>
             <a:off x="4312920" y="4709160"/>
-            <a:ext cx="3563112" cy="1325880"/>
+            <a:ext cx="3563112" cy="1188720"/>
           </a:xfrm>
           <a:prstGeom prst="rect">
             <a:avLst>
-              <a:gd name="adj" fmla="val 6897"/>
+              <a:gd name="adj" fmla="val 7692"/>
             </a:avLst>
           </a:prstGeom>
           <a:solidFill>
@@ -6533,7 +6771,7 @@
                   <a:schemeClr val="tx1"/>
                 </a:solidFill>
               </a:rPr>
-              <a:t>O que acontece com a mesma pessoa entre duas entrevistas trimestrais consecutivas.</a:t>
+              <a:t>O que acontece com a mesma pessoa de um trimestre para o seguinte.</a:t>
             </a:r>
             <a:endParaRPr lang="en-US" sz="1400" dirty="0"/>
           </a:p>
@@ -6541,18 +6779,18 @@
       </p:sp>
       <p:sp>
         <p:nvSpPr>
-          <p:cNvPr id="13" name="Definição: Marco"/>
+          <p:cNvPr id="14" name="Definição: Marco"/>
           <p:cNvSpPr/>
           <p:nvPr/>
         </p:nvSpPr>
         <p:spPr>
           <a:xfrm>
             <a:off x="8077200" y="4709160"/>
-            <a:ext cx="3563112" cy="1325880"/>
+            <a:ext cx="3563112" cy="1188720"/>
           </a:xfrm>
           <a:prstGeom prst="rect">
             <a:avLst>
-              <a:gd name="adj" fmla="val 6897"/>
+              <a:gd name="adj" fmla="val 7692"/>
             </a:avLst>
           </a:prstGeom>
           <a:solidFill>
@@ -6587,9 +6825,89 @@
                   <a:schemeClr val="tx1"/>
                 </a:solidFill>
               </a:rPr>
-              <a:t>Lançamento do ChatGPT: único, nacional e exterior às decisões de quem está na amostra.</a:t>
+              <a:t>O lançamento do ChatGPT: data certa, vale para o país inteiro e ninguém da amostra o escolheu.</a:t>
             </a:r>
             <a:endParaRPr lang="en-US" sz="1400" dirty="0"/>
+          </a:p>
+        </p:txBody>
+      </p:sp>
+      <p:sp>
+        <p:nvSpPr>
+          <p:cNvPr id="15" name="Ato da história"/>
+          <p:cNvSpPr txBox="1"/>
+          <p:nvPr/>
+        </p:nvSpPr>
+        <p:spPr>
+          <a:xfrm>
+            <a:off x="6153912" y="91440"/>
+            <a:ext cx="5486400" cy="256032"/>
+          </a:xfrm>
+          <a:prstGeom prst="rect">
+            <a:avLst/>
+          </a:prstGeom>
+          <a:noFill/>
+          <a:ln/>
+        </p:spPr>
+        <p:txBody>
+          <a:bodyPr wrap="square" lIns="0" tIns="0" rIns="0" bIns="0" rtlCol="0" anchor="ctr"/>
+          <a:lstStyle/>
+          <a:p>
+            <a:pPr algn="r" indent="0" marL="0">
+              <a:buNone/>
+            </a:pPr>
+            <a:r>
+              <a:rPr lang="en-US" sz="1100" b="1" spc="150" kern="0" dirty="0">
+                <a:solidFill>
+                  <a:schemeClr val="accent1"/>
+                </a:solidFill>
+              </a:rPr>
+              <a:t>● CONTEXTO</a:t>
+            </a:r>
+            <a:pPr algn="r" indent="0" marL="0">
+              <a:buNone/>
+            </a:pPr>
+            <a:r>
+              <a:rPr lang="en-US" sz="1100" spc="150" kern="0" dirty="0">
+                <a:solidFill>
+                  <a:schemeClr val="accent6"/>
+                </a:solidFill>
+              </a:rPr>
+              <a:t>   ·   </a:t>
+            </a:r>
+            <a:pPr algn="r" indent="0" marL="0">
+              <a:buNone/>
+            </a:pPr>
+            <a:r>
+              <a:rPr lang="en-US" sz="1100" spc="150" kern="0" dirty="0">
+                <a:solidFill>
+                  <a:schemeClr val="accent6"/>
+                </a:solidFill>
+              </a:rPr>
+              <a:t>TENSÃO</a:t>
+            </a:r>
+            <a:pPr algn="r" indent="0" marL="0">
+              <a:buNone/>
+            </a:pPr>
+            <a:r>
+              <a:rPr lang="en-US" sz="1100" spc="150" kern="0" dirty="0">
+                <a:solidFill>
+                  <a:schemeClr val="accent6"/>
+                </a:solidFill>
+              </a:rPr>
+              <a:t>   ·   </a:t>
+            </a:r>
+            <a:pPr algn="r" indent="0" marL="0">
+              <a:buNone/>
+            </a:pPr>
+            <a:r>
+              <a:rPr lang="en-US" sz="1100" spc="150" kern="0" dirty="0">
+                <a:solidFill>
+                  <a:schemeClr val="accent6"/>
+                </a:solidFill>
+              </a:rPr>
+              <a:t>RESOLUÇÃO</a:t>
+            </a:r>
+            <a:endParaRPr lang="en-US" sz="1100" dirty="0"/>
           </a:p>
         </p:txBody>
       </p:sp>
@@ -6690,14 +7008,14 @@
               <a:buNone/>
             </a:pPr>
             <a:r>
-              <a:rPr lang="en-US" sz="3400" b="1" dirty="0">
+              <a:rPr lang="en-US" sz="3000" b="1" dirty="0">
                 <a:solidFill>
                   <a:schemeClr val="tx2"/>
                 </a:solidFill>
               </a:rPr>
-              <a:t>O que a literatura já mostra</a:t>
-            </a:r>
-            <a:endParaRPr lang="en-US" sz="3400" dirty="0"/>
+              <a:t>A literatura mede a exposição; o Brasil não mede o uso</a:t>
+            </a:r>
+            <a:endParaRPr lang="en-US" sz="3000" dirty="0"/>
           </a:p>
         </p:txBody>
       </p:sp>
@@ -7305,7 +7623,7 @@
                   <a:schemeClr val="accent5"/>
                 </a:solidFill>
               </a:rPr>
-              <a:t>LACUNA  </a:t>
+              <a:t>LACUNA E RELEVÂNCIA  </a:t>
             </a:r>
             <a:pPr indent="0" marL="0">
               <a:buNone/>
@@ -7316,9 +7634,89 @@
                   <a:schemeClr val="bg1"/>
                 </a:solidFill>
               </a:rPr>
-              <a:t>Não há, no Brasil, medida direta de adoção de IA em base representativa. Por isso: exposição ocupacional aplicada a um painel domiciliar rotativo.</a:t>
+              <a:t>Com tanta informalidade, o Brasil pode reagir à IA de outro jeito que os países ricos, mas não há medida direta do uso de IA. Por isso: exposição ocupacional num painel domiciliar.</a:t>
             </a:r>
             <a:endParaRPr lang="en-US" sz="1300" dirty="0"/>
+          </a:p>
+        </p:txBody>
+      </p:sp>
+      <p:sp>
+        <p:nvSpPr>
+          <p:cNvPr id="16" name="Ato da história"/>
+          <p:cNvSpPr txBox="1"/>
+          <p:nvPr/>
+        </p:nvSpPr>
+        <p:spPr>
+          <a:xfrm>
+            <a:off x="6153912" y="91440"/>
+            <a:ext cx="5486400" cy="256032"/>
+          </a:xfrm>
+          <a:prstGeom prst="rect">
+            <a:avLst/>
+          </a:prstGeom>
+          <a:noFill/>
+          <a:ln/>
+        </p:spPr>
+        <p:txBody>
+          <a:bodyPr wrap="square" lIns="0" tIns="0" rIns="0" bIns="0" rtlCol="0" anchor="ctr"/>
+          <a:lstStyle/>
+          <a:p>
+            <a:pPr algn="r" indent="0" marL="0">
+              <a:buNone/>
+            </a:pPr>
+            <a:r>
+              <a:rPr lang="en-US" sz="1100" b="1" spc="150" kern="0" dirty="0">
+                <a:solidFill>
+                  <a:schemeClr val="accent1"/>
+                </a:solidFill>
+              </a:rPr>
+              <a:t>● CONTEXTO</a:t>
+            </a:r>
+            <a:pPr algn="r" indent="0" marL="0">
+              <a:buNone/>
+            </a:pPr>
+            <a:r>
+              <a:rPr lang="en-US" sz="1100" spc="150" kern="0" dirty="0">
+                <a:solidFill>
+                  <a:schemeClr val="accent6"/>
+                </a:solidFill>
+              </a:rPr>
+              <a:t>   ·   </a:t>
+            </a:r>
+            <a:pPr algn="r" indent="0" marL="0">
+              <a:buNone/>
+            </a:pPr>
+            <a:r>
+              <a:rPr lang="en-US" sz="1100" spc="150" kern="0" dirty="0">
+                <a:solidFill>
+                  <a:schemeClr val="accent6"/>
+                </a:solidFill>
+              </a:rPr>
+              <a:t>TENSÃO</a:t>
+            </a:r>
+            <a:pPr algn="r" indent="0" marL="0">
+              <a:buNone/>
+            </a:pPr>
+            <a:r>
+              <a:rPr lang="en-US" sz="1100" spc="150" kern="0" dirty="0">
+                <a:solidFill>
+                  <a:schemeClr val="accent6"/>
+                </a:solidFill>
+              </a:rPr>
+              <a:t>   ·   </a:t>
+            </a:r>
+            <a:pPr algn="r" indent="0" marL="0">
+              <a:buNone/>
+            </a:pPr>
+            <a:r>
+              <a:rPr lang="en-US" sz="1100" spc="150" kern="0" dirty="0">
+                <a:solidFill>
+                  <a:schemeClr val="accent6"/>
+                </a:solidFill>
+              </a:rPr>
+              <a:t>RESOLUÇÃO</a:t>
+            </a:r>
+            <a:endParaRPr lang="en-US" sz="1100" dirty="0"/>
           </a:p>
         </p:txBody>
       </p:sp>
@@ -7419,14 +7817,14 @@
               <a:buNone/>
             </a:pPr>
             <a:r>
-              <a:rPr lang="en-US" sz="3400" b="1" dirty="0">
+              <a:rPr lang="en-US" sz="3000" b="1" dirty="0">
                 <a:solidFill>
                   <a:schemeClr val="tx2"/>
                 </a:solidFill>
               </a:rPr>
-              <a:t>Dados: a PNAD Contínua em painel</a:t>
-            </a:r>
-            <a:endParaRPr lang="en-US" sz="3400" dirty="0"/>
+              <a:t>A PNAD Contínua segue a mesma pessoa por cinco trimestres</a:t>
+            </a:r>
+            <a:endParaRPr lang="en-US" sz="3000" dirty="0"/>
           </a:p>
         </p:txBody>
       </p:sp>
@@ -7832,7 +8230,7 @@
                   <a:schemeClr val="tx2"/>
                 </a:solidFill>
               </a:rPr>
-              <a:t>Pessoas-transições por domínio de estimação</a:t>
+              <a:t>Cada desfecho usa a sua parte da base (pessoas-transições)</a:t>
             </a:r>
             <a:endParaRPr lang="en-US" sz="1600" dirty="0"/>
           </a:p>
@@ -7885,6 +8283,86 @@
                 </a:solidFill>
               </a:rPr>
               <a:t>Fonte: elaboração própria a partir da PNADC/IBGE. São pessoas-transições, e não pessoas únicas: o mesmo indivíduo contribui com até quatro pares.</a:t>
+            </a:r>
+            <a:endParaRPr lang="en-US" sz="1100" dirty="0"/>
+          </a:p>
+        </p:txBody>
+      </p:sp>
+      <p:sp>
+        <p:nvSpPr>
+          <p:cNvPr id="16" name="Ato da história"/>
+          <p:cNvSpPr txBox="1"/>
+          <p:nvPr/>
+        </p:nvSpPr>
+        <p:spPr>
+          <a:xfrm>
+            <a:off x="6153912" y="91440"/>
+            <a:ext cx="5486400" cy="256032"/>
+          </a:xfrm>
+          <a:prstGeom prst="rect">
+            <a:avLst/>
+          </a:prstGeom>
+          <a:noFill/>
+          <a:ln/>
+        </p:spPr>
+        <p:txBody>
+          <a:bodyPr wrap="square" lIns="0" tIns="0" rIns="0" bIns="0" rtlCol="0" anchor="ctr"/>
+          <a:lstStyle/>
+          <a:p>
+            <a:pPr algn="r" indent="0" marL="0">
+              <a:buNone/>
+            </a:pPr>
+            <a:r>
+              <a:rPr lang="en-US" sz="1100" spc="150" kern="0" dirty="0">
+                <a:solidFill>
+                  <a:schemeClr val="accent6"/>
+                </a:solidFill>
+              </a:rPr>
+              <a:t>CONTEXTO</a:t>
+            </a:r>
+            <a:pPr algn="r" indent="0" marL="0">
+              <a:buNone/>
+            </a:pPr>
+            <a:r>
+              <a:rPr lang="en-US" sz="1100" spc="150" kern="0" dirty="0">
+                <a:solidFill>
+                  <a:schemeClr val="accent6"/>
+                </a:solidFill>
+              </a:rPr>
+              <a:t>   ·   </a:t>
+            </a:r>
+            <a:pPr algn="r" indent="0" marL="0">
+              <a:buNone/>
+            </a:pPr>
+            <a:r>
+              <a:rPr lang="en-US" sz="1100" b="1" spc="150" kern="0" dirty="0">
+                <a:solidFill>
+                  <a:schemeClr val="accent1"/>
+                </a:solidFill>
+              </a:rPr>
+              <a:t>● TENSÃO</a:t>
+            </a:r>
+            <a:pPr algn="r" indent="0" marL="0">
+              <a:buNone/>
+            </a:pPr>
+            <a:r>
+              <a:rPr lang="en-US" sz="1100" spc="150" kern="0" dirty="0">
+                <a:solidFill>
+                  <a:schemeClr val="accent6"/>
+                </a:solidFill>
+              </a:rPr>
+              <a:t>   ·   </a:t>
+            </a:r>
+            <a:pPr algn="r" indent="0" marL="0">
+              <a:buNone/>
+            </a:pPr>
+            <a:r>
+              <a:rPr lang="en-US" sz="1100" spc="150" kern="0" dirty="0">
+                <a:solidFill>
+                  <a:schemeClr val="accent6"/>
+                </a:solidFill>
+              </a:rPr>
+              <a:t>RESOLUÇÃO</a:t>
             </a:r>
             <a:endParaRPr lang="en-US" sz="1100" dirty="0"/>
           </a:p>
@@ -7987,14 +8465,14 @@
               <a:buNone/>
             </a:pPr>
             <a:r>
-              <a:rPr lang="en-US" sz="3400" b="1" dirty="0">
+              <a:rPr lang="en-US" sz="3000" b="1" dirty="0">
                 <a:solidFill>
                   <a:schemeClr val="tx2"/>
                 </a:solidFill>
               </a:rPr>
-              <a:t>Como medir a exposição à IA</a:t>
-            </a:r>
-            <a:endParaRPr lang="en-US" sz="3400" dirty="0"/>
+              <a:t>A exposição à IA varia muito entre as ocupações</a:t>
+            </a:r>
+            <a:endParaRPr lang="en-US" sz="3000" dirty="0"/>
           </a:p>
         </p:txBody>
       </p:sp>
@@ -8587,7 +9065,7 @@
                   <a:schemeClr val="tx2"/>
                 </a:solidFill>
               </a:rPr>
-              <a:t>Distribuição do AIOE entre os códigos ocupacionais</a:t>
+              <a:t>As ocupações se espalham por toda a escala do AIOE</a:t>
             </a:r>
             <a:endParaRPr lang="en-US" sz="1600" dirty="0"/>
           </a:p>
@@ -8770,6 +9248,86 @@
                 </a:solidFill>
               </a:rPr>
               <a:t>Fonte: elaboração própria a partir de Felten, Raj e Seamans (2021), Dingel e Neiman (2020) e da PNADC/IBGE. Distribuição entre códigos, e não entre trabalhadores.</a:t>
+            </a:r>
+            <a:endParaRPr lang="en-US" sz="1100" dirty="0"/>
+          </a:p>
+        </p:txBody>
+      </p:sp>
+      <p:sp>
+        <p:nvSpPr>
+          <p:cNvPr id="24" name="Ato da história"/>
+          <p:cNvSpPr txBox="1"/>
+          <p:nvPr/>
+        </p:nvSpPr>
+        <p:spPr>
+          <a:xfrm>
+            <a:off x="6153912" y="91440"/>
+            <a:ext cx="5486400" cy="256032"/>
+          </a:xfrm>
+          <a:prstGeom prst="rect">
+            <a:avLst/>
+          </a:prstGeom>
+          <a:noFill/>
+          <a:ln/>
+        </p:spPr>
+        <p:txBody>
+          <a:bodyPr wrap="square" lIns="0" tIns="0" rIns="0" bIns="0" rtlCol="0" anchor="ctr"/>
+          <a:lstStyle/>
+          <a:p>
+            <a:pPr algn="r" indent="0" marL="0">
+              <a:buNone/>
+            </a:pPr>
+            <a:r>
+              <a:rPr lang="en-US" sz="1100" spc="150" kern="0" dirty="0">
+                <a:solidFill>
+                  <a:schemeClr val="accent6"/>
+                </a:solidFill>
+              </a:rPr>
+              <a:t>CONTEXTO</a:t>
+            </a:r>
+            <a:pPr algn="r" indent="0" marL="0">
+              <a:buNone/>
+            </a:pPr>
+            <a:r>
+              <a:rPr lang="en-US" sz="1100" spc="150" kern="0" dirty="0">
+                <a:solidFill>
+                  <a:schemeClr val="accent6"/>
+                </a:solidFill>
+              </a:rPr>
+              <a:t>   ·   </a:t>
+            </a:r>
+            <a:pPr algn="r" indent="0" marL="0">
+              <a:buNone/>
+            </a:pPr>
+            <a:r>
+              <a:rPr lang="en-US" sz="1100" b="1" spc="150" kern="0" dirty="0">
+                <a:solidFill>
+                  <a:schemeClr val="accent1"/>
+                </a:solidFill>
+              </a:rPr>
+              <a:t>● TENSÃO</a:t>
+            </a:r>
+            <a:pPr algn="r" indent="0" marL="0">
+              <a:buNone/>
+            </a:pPr>
+            <a:r>
+              <a:rPr lang="en-US" sz="1100" spc="150" kern="0" dirty="0">
+                <a:solidFill>
+                  <a:schemeClr val="accent6"/>
+                </a:solidFill>
+              </a:rPr>
+              <a:t>   ·   </a:t>
+            </a:r>
+            <a:pPr algn="r" indent="0" marL="0">
+              <a:buNone/>
+            </a:pPr>
+            <a:r>
+              <a:rPr lang="en-US" sz="1100" spc="150" kern="0" dirty="0">
+                <a:solidFill>
+                  <a:schemeClr val="accent6"/>
+                </a:solidFill>
+              </a:rPr>
+              <a:t>RESOLUÇÃO</a:t>
             </a:r>
             <a:endParaRPr lang="en-US" sz="1100" dirty="0"/>
           </a:p>
@@ -8872,14 +9430,14 @@
               <a:buNone/>
             </a:pPr>
             <a:r>
-              <a:rPr lang="en-US" sz="3400" b="1" dirty="0">
+              <a:rPr lang="en-US" sz="3000" b="1" dirty="0">
                 <a:solidFill>
                   <a:schemeClr val="tx2"/>
                 </a:solidFill>
               </a:rPr>
-              <a:t>Sete desfechos de transição</a:t>
-            </a:r>
-            <a:endParaRPr lang="en-US" sz="3400" dirty="0"/>
+              <a:t>Sete desfechos: vínculo, mobilidade e direção</a:t>
+            </a:r>
+            <a:endParaRPr lang="en-US" sz="3000" dirty="0"/>
           </a:p>
         </p:txBody>
       </p:sp>
@@ -9518,7 +10076,7 @@
                   <a:schemeClr val="accent4"/>
                 </a:solidFill>
               </a:rPr>
-              <a:t>Domínio próprio. </a:t>
+              <a:t>Duas regras. </a:t>
             </a:r>
             <a:pPr indent="0" marL="0">
               <a:buNone/>
@@ -9529,31 +10087,89 @@
                   <a:schemeClr val="bg1"/>
                 </a:solidFill>
               </a:rPr>
-              <a:t>Cada desfecho é estimado onde está definido, e ausência nunca vira zero. </a:t>
-            </a:r>
-            <a:pPr indent="0" marL="0">
-              <a:buNone/>
-            </a:pPr>
-            <a:r>
-              <a:rPr lang="en-US" sz="1600" b="1" dirty="0">
-                <a:solidFill>
-                  <a:schemeClr val="accent4"/>
-                </a:solidFill>
-              </a:rPr>
-              <a:t>Margens direcionais. </a:t>
-            </a:r>
-            <a:pPr indent="0" marL="0">
-              <a:buNone/>
-            </a:pPr>
-            <a:r>
-              <a:rPr lang="en-US" sz="1600" dirty="0">
-                <a:solidFill>
-                  <a:schemeClr val="bg1"/>
-                </a:solidFill>
-              </a:rPr>
-              <a:t>Leem-se juntas: origens mais expostas têm mais destinos possíveis abaixo delas.</a:t>
+              <a:t>Destino não observado nunca vira zero. As duas direções se leem juntas: quem está no topo da exposição tem mais espaço para descer do que para subir.</a:t>
             </a:r>
             <a:endParaRPr lang="en-US" sz="1600" dirty="0"/>
+          </a:p>
+        </p:txBody>
+      </p:sp>
+      <p:sp>
+        <p:nvSpPr>
+          <p:cNvPr id="16" name="Ato da história"/>
+          <p:cNvSpPr txBox="1"/>
+          <p:nvPr/>
+        </p:nvSpPr>
+        <p:spPr>
+          <a:xfrm>
+            <a:off x="6153912" y="91440"/>
+            <a:ext cx="5486400" cy="256032"/>
+          </a:xfrm>
+          <a:prstGeom prst="rect">
+            <a:avLst/>
+          </a:prstGeom>
+          <a:noFill/>
+          <a:ln/>
+        </p:spPr>
+        <p:txBody>
+          <a:bodyPr wrap="square" lIns="0" tIns="0" rIns="0" bIns="0" rtlCol="0" anchor="ctr"/>
+          <a:lstStyle/>
+          <a:p>
+            <a:pPr algn="r" indent="0" marL="0">
+              <a:buNone/>
+            </a:pPr>
+            <a:r>
+              <a:rPr lang="en-US" sz="1100" spc="150" kern="0" dirty="0">
+                <a:solidFill>
+                  <a:schemeClr val="accent6"/>
+                </a:solidFill>
+              </a:rPr>
+              <a:t>CONTEXTO</a:t>
+            </a:r>
+            <a:pPr algn="r" indent="0" marL="0">
+              <a:buNone/>
+            </a:pPr>
+            <a:r>
+              <a:rPr lang="en-US" sz="1100" spc="150" kern="0" dirty="0">
+                <a:solidFill>
+                  <a:schemeClr val="accent6"/>
+                </a:solidFill>
+              </a:rPr>
+              <a:t>   ·   </a:t>
+            </a:r>
+            <a:pPr algn="r" indent="0" marL="0">
+              <a:buNone/>
+            </a:pPr>
+            <a:r>
+              <a:rPr lang="en-US" sz="1100" b="1" spc="150" kern="0" dirty="0">
+                <a:solidFill>
+                  <a:schemeClr val="accent1"/>
+                </a:solidFill>
+              </a:rPr>
+              <a:t>● TENSÃO</a:t>
+            </a:r>
+            <a:pPr algn="r" indent="0" marL="0">
+              <a:buNone/>
+            </a:pPr>
+            <a:r>
+              <a:rPr lang="en-US" sz="1100" spc="150" kern="0" dirty="0">
+                <a:solidFill>
+                  <a:schemeClr val="accent6"/>
+                </a:solidFill>
+              </a:rPr>
+              <a:t>   ·   </a:t>
+            </a:r>
+            <a:pPr algn="r" indent="0" marL="0">
+              <a:buNone/>
+            </a:pPr>
+            <a:r>
+              <a:rPr lang="en-US" sz="1100" spc="150" kern="0" dirty="0">
+                <a:solidFill>
+                  <a:schemeClr val="accent6"/>
+                </a:solidFill>
+              </a:rPr>
+              <a:t>RESOLUÇÃO</a:t>
+            </a:r>
+            <a:endParaRPr lang="en-US" sz="1100" dirty="0"/>
           </a:p>
         </p:txBody>
       </p:sp>
@@ -9654,14 +10270,14 @@
               <a:buNone/>
             </a:pPr>
             <a:r>
-              <a:rPr lang="en-US" sz="3400" b="1" dirty="0">
+              <a:rPr lang="en-US" sz="3000" b="1" dirty="0">
                 <a:solidFill>
                   <a:schemeClr val="tx2"/>
                 </a:solidFill>
               </a:rPr>
-              <a:t>Desenho: diferenças em diferenças contínuas</a:t>
-            </a:r>
-            <a:endParaRPr lang="en-US" sz="3400" dirty="0"/>
+              <a:t>Sem grupo de controle, comparo intensidades de exposição</a:t>
+            </a:r>
+            <a:endParaRPr lang="en-US" sz="3000" dirty="0"/>
           </a:p>
         </p:txBody>
       </p:sp>
@@ -10044,7 +10660,7 @@
             <a:avLst/>
           </a:prstGeom>
           <a:solidFill>
-            <a:schemeClr val="accent3"/>
+            <a:schemeClr val="accent4"/>
           </a:solidFill>
           <a:ln/>
         </p:spPr>
@@ -10058,7 +10674,7 @@
             <a:r>
               <a:rPr lang="en-US" sz="1400" b="1" dirty="0">
                 <a:solidFill>
-                  <a:schemeClr val="bg1"/>
+                  <a:schemeClr val="tx2"/>
                 </a:solidFill>
               </a:rPr>
               <a:t>Pré · 2019T1 a 2022T3 · 15 trimestres</a:t>
@@ -10161,6 +10777,86 @@
               <a:t>Tratamento contínuo: não há grupo tratado e grupo de controle, e sim uma intensidade de exposição que varia entre ocupações.</a:t>
             </a:r>
             <a:endParaRPr lang="en-US" sz="1300" dirty="0"/>
+          </a:p>
+        </p:txBody>
+      </p:sp>
+      <p:sp>
+        <p:nvSpPr>
+          <p:cNvPr id="11" name="Ato da história"/>
+          <p:cNvSpPr txBox="1"/>
+          <p:nvPr/>
+        </p:nvSpPr>
+        <p:spPr>
+          <a:xfrm>
+            <a:off x="6153912" y="91440"/>
+            <a:ext cx="5486400" cy="256032"/>
+          </a:xfrm>
+          <a:prstGeom prst="rect">
+            <a:avLst/>
+          </a:prstGeom>
+          <a:noFill/>
+          <a:ln/>
+        </p:spPr>
+        <p:txBody>
+          <a:bodyPr wrap="square" lIns="0" tIns="0" rIns="0" bIns="0" rtlCol="0" anchor="ctr"/>
+          <a:lstStyle/>
+          <a:p>
+            <a:pPr algn="r" indent="0" marL="0">
+              <a:buNone/>
+            </a:pPr>
+            <a:r>
+              <a:rPr lang="en-US" sz="1100" spc="150" kern="0" dirty="0">
+                <a:solidFill>
+                  <a:schemeClr val="accent6"/>
+                </a:solidFill>
+              </a:rPr>
+              <a:t>CONTEXTO</a:t>
+            </a:r>
+            <a:pPr algn="r" indent="0" marL="0">
+              <a:buNone/>
+            </a:pPr>
+            <a:r>
+              <a:rPr lang="en-US" sz="1100" spc="150" kern="0" dirty="0">
+                <a:solidFill>
+                  <a:schemeClr val="accent6"/>
+                </a:solidFill>
+              </a:rPr>
+              <a:t>   ·   </a:t>
+            </a:r>
+            <a:pPr algn="r" indent="0" marL="0">
+              <a:buNone/>
+            </a:pPr>
+            <a:r>
+              <a:rPr lang="en-US" sz="1100" b="1" spc="150" kern="0" dirty="0">
+                <a:solidFill>
+                  <a:schemeClr val="accent1"/>
+                </a:solidFill>
+              </a:rPr>
+              <a:t>● TENSÃO</a:t>
+            </a:r>
+            <a:pPr algn="r" indent="0" marL="0">
+              <a:buNone/>
+            </a:pPr>
+            <a:r>
+              <a:rPr lang="en-US" sz="1100" spc="150" kern="0" dirty="0">
+                <a:solidFill>
+                  <a:schemeClr val="accent6"/>
+                </a:solidFill>
+              </a:rPr>
+              <a:t>   ·   </a:t>
+            </a:r>
+            <a:pPr algn="r" indent="0" marL="0">
+              <a:buNone/>
+            </a:pPr>
+            <a:r>
+              <a:rPr lang="en-US" sz="1100" spc="150" kern="0" dirty="0">
+                <a:solidFill>
+                  <a:schemeClr val="accent6"/>
+                </a:solidFill>
+              </a:rPr>
+              <a:t>RESOLUÇÃO</a:t>
+            </a:r>
+            <a:endParaRPr lang="en-US" sz="1100" dirty="0"/>
           </a:p>
         </p:txBody>
       </p:sp>
@@ -10261,14 +10957,14 @@
               <a:buNone/>
             </a:pPr>
             <a:r>
-              <a:rPr lang="en-US" sz="3400" b="1" dirty="0">
+              <a:rPr lang="en-US" sz="3000" b="1" dirty="0">
                 <a:solidFill>
                   <a:schemeClr val="tx2"/>
                 </a:solidFill>
               </a:rPr>
-              <a:t>A mobilidade subiu em todas as faixas</a:t>
-            </a:r>
-            <a:endParaRPr lang="en-US" sz="3400" dirty="0"/>
+              <a:t>A mobilidade subiu em todas as faixas de exposição</a:t>
+            </a:r>
+            <a:endParaRPr lang="en-US" sz="3000" dirty="0"/>
           </a:p>
         </p:txBody>
       </p:sp>
@@ -10302,7 +10998,7 @@
                   <a:schemeClr val="tx2"/>
                 </a:solidFill>
               </a:rPr>
-              <a:t>Médias ponderadas antes e depois do marco (%)</a:t>
+              <a:t>Quase tudo subiu; só a saída do emprego ficou parada (%)</a:t>
             </a:r>
             <a:endParaRPr lang="en-US" sz="1600" dirty="0"/>
           </a:p>
@@ -10354,7 +11050,7 @@
                   <a:schemeClr val="tx2"/>
                 </a:solidFill>
               </a:rPr>
-              <a:t>Permanência na mesma faixa: pós − pré (p.p.)</a:t>
+              <a:t>Ficar na mesma faixa caiu em todas (pós − pré, p.p.)</a:t>
             </a:r>
             <a:endParaRPr lang="en-US" sz="1600" dirty="0"/>
           </a:p>
@@ -10414,55 +11110,61 @@
       </p:sp>
       <p:sp>
         <p:nvSpPr>
-          <p:cNvPr id="8" name="Teste de Wald"/>
+          <p:cNvPr id="8" name="Carta: Tensão"/>
           <p:cNvSpPr/>
           <p:nvPr/>
         </p:nvSpPr>
         <p:spPr>
           <a:xfrm>
-            <a:off x="548640" y="4754880"/>
-            <a:ext cx="4736592" cy="1234440"/>
+            <a:off x="548640" y="4709160"/>
+            <a:ext cx="4736592" cy="1298448"/>
           </a:xfrm>
           <a:prstGeom prst="rect">
             <a:avLst>
-              <a:gd name="adj" fmla="val 7407"/>
+              <a:gd name="adj" fmla="val 7042"/>
             </a:avLst>
           </a:prstGeom>
           <a:solidFill>
-            <a:schemeClr val="bg2"/>
+            <a:schemeClr val="accent2"/>
           </a:solidFill>
           <a:ln/>
         </p:spPr>
         <p:txBody>
-          <a:bodyPr wrap="square" lIns="1524" tIns="2540" rIns="2540" bIns="1270" rtlCol="0" anchor="t"/>
-          <a:lstStyle/>
-          <a:p>
-            <a:pPr indent="0" marL="0">
-              <a:buNone/>
-            </a:pPr>
-            <a:r>
-              <a:rPr lang="en-US" sz="1700" b="1" dirty="0">
-                <a:solidFill>
-                  <a:schemeClr val="accent1"/>
-                </a:solidFill>
-              </a:rPr>
-              <a:t>Cai em todas as cinco faixas</a:t>
-            </a:r>
-            <a:endParaRPr lang="en-US" sz="1400" dirty="0"/>
-          </a:p>
-          <a:p>
-            <a:pPr indent="0" marL="0">
-              <a:buNone/>
-            </a:pPr>
-            <a:r>
-              <a:rPr lang="en-US" sz="1500" dirty="0">
-                <a:solidFill>
-                  <a:schemeClr val="tx1"/>
-                </a:solidFill>
-              </a:rPr>
-              <a:t>Entre 3,6 e 8,1 p.p. Teste de Wald de igualdade das matrizes: χ² = 3.040,1, com 20 graus de liberdade.</a:t>
-            </a:r>
-            <a:endParaRPr lang="en-US" sz="1400" dirty="0"/>
+          <a:bodyPr wrap="square" lIns="1270" tIns="2794" rIns="2794" bIns="1270" rtlCol="0" anchor="ctr"/>
+          <a:lstStyle/>
+          <a:p>
+            <a:pPr indent="0" marL="0">
+              <a:spcAft>
+                <a:spcPts val="400"/>
+              </a:spcAft>
+              <a:buNone/>
+            </a:pPr>
+            <a:r>
+              <a:rPr lang="en-US" sz="1300" b="1" spc="300" kern="0" dirty="0">
+                <a:solidFill>
+                  <a:schemeClr val="accent4"/>
+                </a:solidFill>
+              </a:rPr>
+              <a:t>TENSÃO</a:t>
+            </a:r>
+            <a:endParaRPr lang="en-US" sz="1300" dirty="0"/>
+          </a:p>
+          <a:p>
+            <a:pPr indent="0" marL="0">
+              <a:spcAft>
+                <a:spcPts val="400"/>
+              </a:spcAft>
+              <a:buNone/>
+            </a:pPr>
+            <a:r>
+              <a:rPr lang="en-US" sz="1600" dirty="0">
+                <a:solidFill>
+                  <a:schemeClr val="bg1"/>
+                </a:solidFill>
+              </a:rPr>
+              <a:t>A mobilidade subiu em todas as faixas, e não só nas mais expostas. Então, a IA explica alguma parte desse movimento?</a:t>
+            </a:r>
+            <a:endParaRPr lang="en-US" sz="1300" dirty="0"/>
           </a:p>
         </p:txBody>
       </p:sp>
@@ -10496,7 +11198,87 @@
                   <a:schemeClr val="accent6"/>
                 </a:solidFill>
               </a:rPr>
-              <a:t>Fonte: elaboração própria a partir da PNADC/IBGE. Médias ponderadas pelo peso da origem, cada uma no domínio do desfecho.</a:t>
+              <a:t>Fonte: elaboração própria a partir da PNADC/IBGE. Médias ponderadas pelo peso da origem. Teste de Wald de igualdade das matrizes: χ² = 3.040,1 (20 g.l.).</a:t>
+            </a:r>
+            <a:endParaRPr lang="en-US" sz="1100" dirty="0"/>
+          </a:p>
+        </p:txBody>
+      </p:sp>
+      <p:sp>
+        <p:nvSpPr>
+          <p:cNvPr id="10" name="Ato da história"/>
+          <p:cNvSpPr txBox="1"/>
+          <p:nvPr/>
+        </p:nvSpPr>
+        <p:spPr>
+          <a:xfrm>
+            <a:off x="6153912" y="91440"/>
+            <a:ext cx="5486400" cy="256032"/>
+          </a:xfrm>
+          <a:prstGeom prst="rect">
+            <a:avLst/>
+          </a:prstGeom>
+          <a:noFill/>
+          <a:ln/>
+        </p:spPr>
+        <p:txBody>
+          <a:bodyPr wrap="square" lIns="0" tIns="0" rIns="0" bIns="0" rtlCol="0" anchor="ctr"/>
+          <a:lstStyle/>
+          <a:p>
+            <a:pPr algn="r" indent="0" marL="0">
+              <a:buNone/>
+            </a:pPr>
+            <a:r>
+              <a:rPr lang="en-US" sz="1100" spc="150" kern="0" dirty="0">
+                <a:solidFill>
+                  <a:schemeClr val="accent6"/>
+                </a:solidFill>
+              </a:rPr>
+              <a:t>CONTEXTO</a:t>
+            </a:r>
+            <a:pPr algn="r" indent="0" marL="0">
+              <a:buNone/>
+            </a:pPr>
+            <a:r>
+              <a:rPr lang="en-US" sz="1100" spc="150" kern="0" dirty="0">
+                <a:solidFill>
+                  <a:schemeClr val="accent6"/>
+                </a:solidFill>
+              </a:rPr>
+              <a:t>   ·   </a:t>
+            </a:r>
+            <a:pPr algn="r" indent="0" marL="0">
+              <a:buNone/>
+            </a:pPr>
+            <a:r>
+              <a:rPr lang="en-US" sz="1100" b="1" spc="150" kern="0" dirty="0">
+                <a:solidFill>
+                  <a:schemeClr val="accent1"/>
+                </a:solidFill>
+              </a:rPr>
+              <a:t>● TENSÃO</a:t>
+            </a:r>
+            <a:pPr algn="r" indent="0" marL="0">
+              <a:buNone/>
+            </a:pPr>
+            <a:r>
+              <a:rPr lang="en-US" sz="1100" spc="150" kern="0" dirty="0">
+                <a:solidFill>
+                  <a:schemeClr val="accent6"/>
+                </a:solidFill>
+              </a:rPr>
+              <a:t>   ·   </a:t>
+            </a:r>
+            <a:pPr algn="r" indent="0" marL="0">
+              <a:buNone/>
+            </a:pPr>
+            <a:r>
+              <a:rPr lang="en-US" sz="1100" spc="150" kern="0" dirty="0">
+                <a:solidFill>
+                  <a:schemeClr val="accent6"/>
+                </a:solidFill>
+              </a:rPr>
+              <a:t>RESOLUÇÃO</a:t>
             </a:r>
             <a:endParaRPr lang="en-US" sz="1100" dirty="0"/>
           </a:p>
@@ -10599,14 +11381,14 @@
               <a:buNone/>
             </a:pPr>
             <a:r>
-              <a:rPr lang="en-US" sz="3400" b="1" dirty="0">
+              <a:rPr lang="en-US" sz="3000" b="1" dirty="0">
                 <a:solidFill>
                   <a:schemeClr val="tx2"/>
                 </a:solidFill>
               </a:rPr>
-              <a:t>Resultado principal: o gradiente de exposição</a:t>
-            </a:r>
-            <a:endParaRPr lang="en-US" sz="3400" dirty="0"/>
+              <a:t>Mais exposição, mais mudança para ocupações menos expostas</a:t>
+            </a:r>
+            <a:endParaRPr lang="en-US" sz="3000" dirty="0"/>
           </a:p>
         </p:txBody>
       </p:sp>
@@ -10737,7 +11519,7 @@
             <a:avLst/>
           </a:prstGeom>
           <a:solidFill>
-            <a:srgbClr val="B08A22"/>
+            <a:srgbClr val="123B2B"/>
           </a:solidFill>
           <a:ln/>
         </p:spPr>
@@ -11775,7 +12557,7 @@
           <a:noFill/>
           <a:ln w="31750">
             <a:solidFill>
-              <a:srgbClr val="B08A22"/>
+              <a:srgbClr val="123B2B"/>
             </a:solidFill>
             <a:prstDash val="solid"/>
           </a:ln>
@@ -11798,7 +12580,7 @@
           <a:noFill/>
           <a:ln w="25400">
             <a:solidFill>
-              <a:srgbClr val="B08A22"/>
+              <a:srgbClr val="123B2B"/>
             </a:solidFill>
             <a:prstDash val="solid"/>
           </a:ln>
@@ -11821,7 +12603,7 @@
           <a:noFill/>
           <a:ln w="25400">
             <a:solidFill>
-              <a:srgbClr val="B08A22"/>
+              <a:srgbClr val="123B2B"/>
             </a:solidFill>
             <a:prstDash val="solid"/>
           </a:ln>
@@ -11842,11 +12624,11 @@
             <a:avLst/>
           </a:prstGeom>
           <a:solidFill>
-            <a:srgbClr val="B08A22"/>
+            <a:srgbClr val="123B2B"/>
           </a:solidFill>
           <a:ln w="25400">
             <a:solidFill>
-              <a:srgbClr val="B08A22"/>
+              <a:srgbClr val="123B2B"/>
             </a:solidFill>
             <a:prstDash val="solid"/>
           </a:ln>
@@ -12107,7 +12889,7 @@
           <a:noFill/>
           <a:ln w="31750">
             <a:solidFill>
-              <a:srgbClr val="B08A22"/>
+              <a:srgbClr val="123B2B"/>
             </a:solidFill>
             <a:prstDash val="solid"/>
           </a:ln>
@@ -12130,7 +12912,7 @@
           <a:noFill/>
           <a:ln w="25400">
             <a:solidFill>
-              <a:srgbClr val="B08A22"/>
+              <a:srgbClr val="123B2B"/>
             </a:solidFill>
             <a:prstDash val="solid"/>
           </a:ln>
@@ -12153,7 +12935,7 @@
           <a:noFill/>
           <a:ln w="25400">
             <a:solidFill>
-              <a:srgbClr val="B08A22"/>
+              <a:srgbClr val="123B2B"/>
             </a:solidFill>
             <a:prstDash val="solid"/>
           </a:ln>
@@ -12174,11 +12956,11 @@
             <a:avLst/>
           </a:prstGeom>
           <a:solidFill>
-            <a:srgbClr val="B08A22"/>
+            <a:srgbClr val="123B2B"/>
           </a:solidFill>
           <a:ln w="25400">
             <a:solidFill>
-              <a:srgbClr val="B08A22"/>
+              <a:srgbClr val="123B2B"/>
             </a:solidFill>
             <a:prstDash val="solid"/>
           </a:ln>
@@ -12780,6 +13562,86 @@
                 </a:solidFill>
               </a:rPr>
               <a:t>Fonte: elaboração própria a partir da PNADC/IBGE. Erros-padrão por UPA; sete desfechos, sem correção para multiplicidade.</a:t>
+            </a:r>
+            <a:endParaRPr lang="en-US" sz="1100" dirty="0"/>
+          </a:p>
+        </p:txBody>
+      </p:sp>
+      <p:sp>
+        <p:nvSpPr>
+          <p:cNvPr id="76" name="Ato da história"/>
+          <p:cNvSpPr txBox="1"/>
+          <p:nvPr/>
+        </p:nvSpPr>
+        <p:spPr>
+          <a:xfrm>
+            <a:off x="6153912" y="91440"/>
+            <a:ext cx="5486400" cy="256032"/>
+          </a:xfrm>
+          <a:prstGeom prst="rect">
+            <a:avLst/>
+          </a:prstGeom>
+          <a:noFill/>
+          <a:ln/>
+        </p:spPr>
+        <p:txBody>
+          <a:bodyPr wrap="square" lIns="0" tIns="0" rIns="0" bIns="0" rtlCol="0" anchor="ctr"/>
+          <a:lstStyle/>
+          <a:p>
+            <a:pPr algn="r" indent="0" marL="0">
+              <a:buNone/>
+            </a:pPr>
+            <a:r>
+              <a:rPr lang="en-US" sz="1100" spc="150" kern="0" dirty="0">
+                <a:solidFill>
+                  <a:schemeClr val="accent6"/>
+                </a:solidFill>
+              </a:rPr>
+              <a:t>CONTEXTO</a:t>
+            </a:r>
+            <a:pPr algn="r" indent="0" marL="0">
+              <a:buNone/>
+            </a:pPr>
+            <a:r>
+              <a:rPr lang="en-US" sz="1100" spc="150" kern="0" dirty="0">
+                <a:solidFill>
+                  <a:schemeClr val="accent6"/>
+                </a:solidFill>
+              </a:rPr>
+              <a:t>   ·   </a:t>
+            </a:r>
+            <a:pPr algn="r" indent="0" marL="0">
+              <a:buNone/>
+            </a:pPr>
+            <a:r>
+              <a:rPr lang="en-US" sz="1100" spc="150" kern="0" dirty="0">
+                <a:solidFill>
+                  <a:schemeClr val="accent6"/>
+                </a:solidFill>
+              </a:rPr>
+              <a:t>TENSÃO</a:t>
+            </a:r>
+            <a:pPr algn="r" indent="0" marL="0">
+              <a:buNone/>
+            </a:pPr>
+            <a:r>
+              <a:rPr lang="en-US" sz="1100" spc="150" kern="0" dirty="0">
+                <a:solidFill>
+                  <a:schemeClr val="accent6"/>
+                </a:solidFill>
+              </a:rPr>
+              <a:t>   ·   </a:t>
+            </a:r>
+            <a:pPr algn="r" indent="0" marL="0">
+              <a:buNone/>
+            </a:pPr>
+            <a:r>
+              <a:rPr lang="en-US" sz="1100" b="1" spc="150" kern="0" dirty="0">
+                <a:solidFill>
+                  <a:schemeClr val="accent1"/>
+                </a:solidFill>
+              </a:rPr>
+              <a:t>● RESOLUÇÃO</a:t>
             </a:r>
             <a:endParaRPr lang="en-US" sz="1100" dirty="0"/>
           </a:p>
